--- a/PPT/Final.pptx
+++ b/PPT/Final.pptx
@@ -5,10 +5,10 @@
     <p:sldMasterId id="2147483648" r:id="rId4"/>
   </p:sldMasterIdLst>
   <p:notesMasterIdLst>
-    <p:notesMasterId r:id="rId26"/>
+    <p:notesMasterId r:id="rId23"/>
   </p:notesMasterIdLst>
   <p:handoutMasterIdLst>
-    <p:handoutMasterId r:id="rId27"/>
+    <p:handoutMasterId r:id="rId24"/>
   </p:handoutMasterIdLst>
   <p:sldIdLst>
     <p:sldId id="256" r:id="rId5"/>
@@ -20,18 +20,15 @@
     <p:sldId id="273" r:id="rId11"/>
     <p:sldId id="275" r:id="rId12"/>
     <p:sldId id="277" r:id="rId13"/>
-    <p:sldId id="274" r:id="rId14"/>
-    <p:sldId id="280" r:id="rId15"/>
-    <p:sldId id="279" r:id="rId16"/>
-    <p:sldId id="281" r:id="rId17"/>
-    <p:sldId id="282" r:id="rId18"/>
-    <p:sldId id="283" r:id="rId19"/>
-    <p:sldId id="284" r:id="rId20"/>
-    <p:sldId id="285" r:id="rId21"/>
-    <p:sldId id="286" r:id="rId22"/>
-    <p:sldId id="287" r:id="rId23"/>
-    <p:sldId id="288" r:id="rId24"/>
-    <p:sldId id="268" r:id="rId25"/>
+    <p:sldId id="281" r:id="rId14"/>
+    <p:sldId id="282" r:id="rId15"/>
+    <p:sldId id="283" r:id="rId16"/>
+    <p:sldId id="284" r:id="rId17"/>
+    <p:sldId id="285" r:id="rId18"/>
+    <p:sldId id="286" r:id="rId19"/>
+    <p:sldId id="287" r:id="rId20"/>
+    <p:sldId id="288" r:id="rId21"/>
+    <p:sldId id="268" r:id="rId22"/>
   </p:sldIdLst>
   <p:sldSz cx="9144000" cy="6858000" type="screen4x3"/>
   <p:notesSz cx="7559675" cy="10691813"/>
@@ -244,7 +241,7 @@
             <a:fld id="{25D2B5EB-424D-4C39-A8AB-65F1D7895EF3}" type="datetimeFigureOut">
               <a:rPr lang="en-US" smtClean="0"/>
               <a:pPr/>
-              <a:t>4/29/2026</a:t>
+              <a:t>5/2/2026</a:t>
             </a:fld>
             <a:endParaRPr lang="en-US"/>
           </a:p>
@@ -427,7 +424,7 @@
             <a:fld id="{888BC1CF-45D5-4DEE-AAB8-8C5341844FC9}" type="datetimeFigureOut">
               <a:rPr lang="en-US" smtClean="0"/>
               <a:pPr/>
-              <a:t>4/29/2026</a:t>
+              <a:t>5/2/2026</a:t>
             </a:fld>
             <a:endParaRPr lang="en-US"/>
           </a:p>
@@ -3634,6 +3631,17 @@
               </a:spcBef>
             </a:pPr>
             <a:r>
+              <a:rPr lang="en-US" sz="2000" spc="-1">
+                <a:solidFill>
+                  <a:srgbClr val="000000"/>
+                </a:solidFill>
+                <a:latin typeface="Times New Roman" panose="02020603050405020304" pitchFamily="18" charset="0"/>
+                <a:ea typeface="MS PGothic"/>
+                <a:cs typeface="Times New Roman" panose="02020603050405020304" pitchFamily="18" charset="0"/>
+              </a:rPr>
+              <a:t>Dr. Simarjeet </a:t>
+            </a:r>
+            <a:r>
               <a:rPr lang="en-US" sz="2000" spc="-1" dirty="0">
                 <a:solidFill>
                   <a:srgbClr val="000000"/>
@@ -3642,7 +3650,7 @@
                 <a:ea typeface="MS PGothic"/>
                 <a:cs typeface="Times New Roman" panose="02020603050405020304" pitchFamily="18" charset="0"/>
               </a:rPr>
-              <a:t>Simarjeet Kaur </a:t>
+              <a:t>Kaur </a:t>
             </a:r>
             <a:endParaRPr lang="en-US" sz="2000" b="0" strike="noStrike" spc="-1" dirty="0">
               <a:solidFill>
@@ -3806,7 +3814,35 @@
                 <a:latin typeface="Times New Roman" panose="02020603050405020304" pitchFamily="18" charset="0"/>
                 <a:cs typeface="Times New Roman" panose="02020603050405020304" pitchFamily="18" charset="0"/>
               </a:rPr>
-              <a:t>Experimental Setup </a:t>
+              <a:t>Impact on AI on Student Learni</a:t>
+            </a:r>
+            <a:r>
+              <a:rPr lang="en-IN" sz="3200" dirty="0">
+                <a:latin typeface="Times New Roman" panose="02020603050405020304" pitchFamily="18" charset="0"/>
+                <a:cs typeface="Times New Roman" panose="02020603050405020304" pitchFamily="18" charset="0"/>
+              </a:rPr>
+              <a:t>ng</a:t>
+            </a:r>
+            <a:r>
+              <a:rPr lang="en" sz="3200" dirty="0">
+                <a:latin typeface="Times New Roman" panose="02020603050405020304" pitchFamily="18" charset="0"/>
+                <a:cs typeface="Times New Roman" panose="02020603050405020304" pitchFamily="18" charset="0"/>
+              </a:rPr>
+              <a:t> a</a:t>
+            </a:r>
+            <a:r>
+              <a:rPr lang="en-IN" sz="3200" dirty="0" err="1">
+                <a:latin typeface="Times New Roman" panose="02020603050405020304" pitchFamily="18" charset="0"/>
+                <a:cs typeface="Times New Roman" panose="02020603050405020304" pitchFamily="18" charset="0"/>
+              </a:rPr>
+              <a:t>nd</a:t>
+            </a:r>
+            <a:r>
+              <a:rPr lang="en" sz="3200" dirty="0">
+                <a:latin typeface="Times New Roman" panose="02020603050405020304" pitchFamily="18" charset="0"/>
+                <a:cs typeface="Times New Roman" panose="02020603050405020304" pitchFamily="18" charset="0"/>
+              </a:rPr>
+              <a:t> Engagement </a:t>
             </a:r>
             <a:endParaRPr lang="en-US" sz="3000" b="0" strike="noStrike" spc="-1" dirty="0">
               <a:solidFill>
@@ -3896,20 +3932,13 @@
           </a:bodyPr>
           <a:lstStyle/>
           <a:p>
-            <a:pPr>
-              <a:lnSpc>
-                <a:spcPct val="150000"/>
-              </a:lnSpc>
-              <a:spcBef>
-                <a:spcPts val="400"/>
-              </a:spcBef>
-            </a:pPr>
-            <a:endParaRPr lang="en-US" sz="1900" b="0" strike="noStrike" spc="-1" dirty="0">
-              <a:solidFill>
-                <a:srgbClr val="000000"/>
-              </a:solidFill>
-              <a:latin typeface="Calibri"/>
-            </a:endParaRPr>
+            <a:pPr marL="139700" lvl="0">
+              <a:buClr>
+                <a:srgbClr val="000000"/>
+              </a:buClr>
+              <a:buSzPts val="1400"/>
+            </a:pPr>
+            <a:endParaRPr lang="en-US" sz="2000" dirty="0"/>
           </a:p>
           <a:p>
             <a:pPr marL="457200" lvl="0" indent="-317500">
@@ -3920,31 +3949,8 @@
               <a:buChar char="●"/>
             </a:pPr>
             <a:r>
-              <a:rPr lang="en-IN" sz="2000" dirty="0"/>
-              <a:t>Laptop / smartphone </a:t>
-            </a:r>
-          </a:p>
-          <a:p>
-            <a:pPr marL="457200" lvl="0" indent="-317500">
-              <a:buClr>
-                <a:srgbClr val="000000"/>
-              </a:buClr>
-              <a:buSzPts val="1400"/>
-              <a:buChar char="●"/>
-            </a:pPr>
-            <a:endParaRPr lang="en-US" sz="2000" dirty="0"/>
-          </a:p>
-          <a:p>
-            <a:pPr marL="457200" lvl="0" indent="-317500">
-              <a:buClr>
-                <a:srgbClr val="000000"/>
-              </a:buClr>
-              <a:buSzPts val="1400"/>
-              <a:buChar char="●"/>
-            </a:pPr>
-            <a:r>
               <a:rPr lang="en-US" sz="2000" dirty="0"/>
-              <a:t>Internet-based AI tools </a:t>
+              <a:t>Personalized learning experience</a:t>
             </a:r>
           </a:p>
           <a:p>
@@ -3973,7 +3979,7 @@
                 <a:ea typeface="Calibri" panose="020F0502020204030204" pitchFamily="34" charset="0"/>
                 <a:cs typeface="Times New Roman" panose="02020603050405020304" pitchFamily="18" charset="0"/>
               </a:rPr>
-              <a:t>Same environment for all tests </a:t>
+              <a:t>Improves understanding and retention</a:t>
             </a:r>
           </a:p>
           <a:p>
@@ -4008,14 +4014,61 @@
                 <a:ea typeface="Calibri" panose="020F0502020204030204" pitchFamily="34" charset="0"/>
                 <a:cs typeface="Times New Roman" panose="02020603050405020304" pitchFamily="18" charset="0"/>
               </a:rPr>
-              <a:t>Standard academic tasks </a:t>
-            </a:r>
-            <a:endParaRPr lang="en-US" sz="3600" dirty="0">
+              <a:t>Faster task completion </a:t>
+            </a:r>
+          </a:p>
+          <a:p>
+            <a:pPr marL="457200" lvl="0" indent="-317500">
+              <a:buClr>
+                <a:srgbClr val="000000"/>
+              </a:buClr>
+              <a:buSzPts val="1400"/>
+              <a:buChar char="●"/>
+            </a:pPr>
+            <a:endParaRPr lang="en-US" sz="2000" dirty="0">
+              <a:solidFill>
+                <a:srgbClr val="000000"/>
+              </a:solidFill>
               <a:ea typeface="Calibri" panose="020F0502020204030204" pitchFamily="34" charset="0"/>
               <a:cs typeface="Times New Roman" panose="02020603050405020304" pitchFamily="18" charset="0"/>
             </a:endParaRPr>
           </a:p>
           <a:p>
+            <a:pPr marL="457200" lvl="0" indent="-317500">
+              <a:buClr>
+                <a:srgbClr val="000000"/>
+              </a:buClr>
+              <a:buSzPts val="1400"/>
+              <a:buChar char="●"/>
+            </a:pPr>
+            <a:r>
+              <a:rPr lang="en-US" sz="2000" dirty="0">
+                <a:solidFill>
+                  <a:srgbClr val="000000"/>
+                </a:solidFill>
+                <a:ea typeface="Calibri" panose="020F0502020204030204" pitchFamily="34" charset="0"/>
+                <a:cs typeface="Times New Roman" panose="02020603050405020304" pitchFamily="18" charset="0"/>
+              </a:rPr>
+              <a:t>Higher student engagement </a:t>
+            </a:r>
+          </a:p>
+          <a:p>
+            <a:pPr marL="457200" lvl="0" indent="-317500">
+              <a:buClr>
+                <a:srgbClr val="000000"/>
+              </a:buClr>
+              <a:buSzPts val="1400"/>
+              <a:buChar char="●"/>
+            </a:pPr>
+            <a:endParaRPr lang="en-US" sz="2000" dirty="0">
+              <a:solidFill>
+                <a:srgbClr val="000000"/>
+              </a:solidFill>
+              <a:ea typeface="Calibri" panose="020F0502020204030204" pitchFamily="34" charset="0"/>
+              <a:cs typeface="Times New Roman" panose="02020603050405020304" pitchFamily="18" charset="0"/>
+            </a:endParaRPr>
+          </a:p>
+          <a:p>
             <a:pPr>
               <a:lnSpc>
                 <a:spcPct val="100000"/>
@@ -4193,10 +4246,81 @@
           </a:p>
         </p:txBody>
       </p:sp>
+      <p:pic>
+        <p:nvPicPr>
+          <p:cNvPr id="3" name="Picture 2">
+            <a:extLst>
+              <a:ext uri="{FF2B5EF4-FFF2-40B4-BE49-F238E27FC236}">
+                <a16:creationId xmlns:a16="http://schemas.microsoft.com/office/drawing/2014/main" id="{C5BBB3A3-DB7E-1154-F17C-3089617F6B7D}"/>
+              </a:ext>
+            </a:extLst>
+          </p:cNvPr>
+          <p:cNvPicPr>
+            <a:picLocks noChangeAspect="1"/>
+          </p:cNvPicPr>
+          <p:nvPr/>
+        </p:nvPicPr>
+        <p:blipFill>
+          <a:blip r:embed="rId2">
+            <a:extLst>
+              <a:ext uri="{28A0092B-C50C-407E-A947-70E740481C1C}">
+                <a14:useLocalDpi xmlns:a14="http://schemas.microsoft.com/office/drawing/2010/main" val="0"/>
+              </a:ext>
+            </a:extLst>
+          </a:blip>
+          <a:srcRect/>
+          <a:stretch>
+            <a:fillRect/>
+          </a:stretch>
+        </p:blipFill>
+        <p:spPr bwMode="auto">
+          <a:xfrm>
+            <a:off x="457200" y="3690705"/>
+            <a:ext cx="3895343" cy="2921307"/>
+          </a:xfrm>
+          <a:prstGeom prst="rect">
+            <a:avLst/>
+          </a:prstGeom>
+          <a:noFill/>
+          <a:ln>
+            <a:noFill/>
+          </a:ln>
+        </p:spPr>
+      </p:pic>
+      <p:pic>
+        <p:nvPicPr>
+          <p:cNvPr id="9" name="Picture 8">
+            <a:extLst>
+              <a:ext uri="{FF2B5EF4-FFF2-40B4-BE49-F238E27FC236}">
+                <a16:creationId xmlns:a16="http://schemas.microsoft.com/office/drawing/2014/main" id="{AA4D5E7E-F171-2EBA-69A2-D9EF063ABC94}"/>
+              </a:ext>
+            </a:extLst>
+          </p:cNvPr>
+          <p:cNvPicPr>
+            <a:picLocks noChangeAspect="1"/>
+          </p:cNvPicPr>
+          <p:nvPr/>
+        </p:nvPicPr>
+        <p:blipFill>
+          <a:blip r:embed="rId3"/>
+          <a:stretch>
+            <a:fillRect/>
+          </a:stretch>
+        </p:blipFill>
+        <p:spPr>
+          <a:xfrm>
+            <a:off x="4465964" y="2439786"/>
+            <a:ext cx="4678036" cy="3508527"/>
+          </a:xfrm>
+          <a:prstGeom prst="rect">
+            <a:avLst/>
+          </a:prstGeom>
+        </p:spPr>
+      </p:pic>
     </p:spTree>
     <p:extLst>
       <p:ext uri="{BB962C8B-B14F-4D97-AF65-F5344CB8AC3E}">
-        <p14:creationId xmlns:p14="http://schemas.microsoft.com/office/powerpoint/2010/main" val="3824143121"/>
+        <p14:creationId xmlns:p14="http://schemas.microsoft.com/office/powerpoint/2010/main" val="1145519295"/>
       </p:ext>
     </p:extLst>
   </p:cSld>
@@ -4258,7 +4382,7 @@
                 <a:latin typeface="Times New Roman" panose="02020603050405020304" pitchFamily="18" charset="0"/>
                 <a:cs typeface="Times New Roman" panose="02020603050405020304" pitchFamily="18" charset="0"/>
               </a:rPr>
-              <a:t>Result – Performance </a:t>
+              <a:t>Impact of AI on Teaching Efficiency   </a:t>
             </a:r>
             <a:endParaRPr lang="en-US" sz="3000" b="0" strike="noStrike" spc="-1" dirty="0">
               <a:solidFill>
@@ -4348,56 +4472,143 @@
           </a:bodyPr>
           <a:lstStyle/>
           <a:p>
-            <a:pPr>
-              <a:lnSpc>
-                <a:spcPct val="150000"/>
-              </a:lnSpc>
-              <a:spcBef>
-                <a:spcPts val="400"/>
-              </a:spcBef>
+            <a:pPr marL="457200" lvl="0" indent="-317500">
+              <a:buClr>
+                <a:srgbClr val="000000"/>
+              </a:buClr>
+              <a:buSzPts val="1400"/>
+              <a:buChar char="●"/>
+            </a:pPr>
+            <a:endParaRPr lang="en-US" sz="2000" dirty="0"/>
+          </a:p>
+          <a:p>
+            <a:pPr marL="457200" lvl="0" indent="-317500">
+              <a:buClr>
+                <a:srgbClr val="000000"/>
+              </a:buClr>
+              <a:buSzPts val="1400"/>
+              <a:buChar char="●"/>
             </a:pPr>
             <a:r>
               <a:rPr lang="en-US" sz="2000" dirty="0"/>
-              <a:t>		Comparison of AI Tools Performance</a:t>
-            </a:r>
-            <a:endParaRPr lang="en-US" sz="1900" b="0" strike="noStrike" spc="-1" dirty="0">
-              <a:solidFill>
-                <a:srgbClr val="000000"/>
-              </a:solidFill>
-              <a:latin typeface="Calibri"/>
-            </a:endParaRPr>
-          </a:p>
-          <a:p>
-            <a:pPr marL="342900" indent="-342900">
-              <a:lnSpc>
-                <a:spcPct val="100000"/>
-              </a:lnSpc>
-              <a:spcBef>
-                <a:spcPts val="400"/>
-              </a:spcBef>
-              <a:buFont typeface="Arial" panose="020B0604020202020204" pitchFamily="34" charset="0"/>
-              <a:buChar char="•"/>
-            </a:pPr>
-            <a:r>
-              <a:rPr lang="en-US" sz="1900" b="0" strike="noStrike" spc="-1" dirty="0">
+              <a:t>Reduced grading and planning time</a:t>
+            </a:r>
+          </a:p>
+          <a:p>
+            <a:pPr marL="457200" lvl="0" indent="-317500">
+              <a:buClr>
+                <a:srgbClr val="000000"/>
+              </a:buClr>
+              <a:buSzPts val="1400"/>
+              <a:buChar char="●"/>
+            </a:pPr>
+            <a:endParaRPr lang="en-IN" sz="2000" dirty="0"/>
+          </a:p>
+          <a:p>
+            <a:pPr marL="457200" lvl="0" indent="-317500">
+              <a:buClr>
+                <a:srgbClr val="000000"/>
+              </a:buClr>
+              <a:buSzPts val="1400"/>
+              <a:buChar char="●"/>
+            </a:pPr>
+            <a:r>
+              <a:rPr lang="en-US" sz="2000" dirty="0">
                 <a:solidFill>
                   <a:srgbClr val="000000"/>
                 </a:solidFill>
-                <a:latin typeface="Calibri"/>
+                <a:ea typeface="Calibri" panose="020F0502020204030204" pitchFamily="34" charset="0"/>
+                <a:cs typeface="Times New Roman" panose="02020603050405020304" pitchFamily="18" charset="0"/>
               </a:rPr>
-              <a:t>	</a:t>
-            </a:r>
-          </a:p>
-          <a:p>
-            <a:pPr marL="342900" indent="-342900">
-              <a:lnSpc>
-                <a:spcPct val="100000"/>
-              </a:lnSpc>
-              <a:spcBef>
-                <a:spcPts val="400"/>
-              </a:spcBef>
-              <a:buFont typeface="Arial" panose="020B0604020202020204" pitchFamily="34" charset="0"/>
-              <a:buChar char="•"/>
+              <a:t>Instant feedback generation </a:t>
+            </a:r>
+          </a:p>
+          <a:p>
+            <a:pPr marL="457200" lvl="0" indent="-317500">
+              <a:buClr>
+                <a:srgbClr val="000000"/>
+              </a:buClr>
+              <a:buSzPts val="1400"/>
+              <a:buChar char="●"/>
+            </a:pPr>
+            <a:endParaRPr lang="en-US" sz="2000" dirty="0">
+              <a:solidFill>
+                <a:srgbClr val="000000"/>
+              </a:solidFill>
+              <a:ea typeface="Calibri" panose="020F0502020204030204" pitchFamily="34" charset="0"/>
+              <a:cs typeface="Times New Roman" panose="02020603050405020304" pitchFamily="18" charset="0"/>
+            </a:endParaRPr>
+          </a:p>
+          <a:p>
+            <a:pPr marL="457200" lvl="0" indent="-317500">
+              <a:buClr>
+                <a:srgbClr val="000000"/>
+              </a:buClr>
+              <a:buSzPts val="1400"/>
+              <a:buChar char="●"/>
+            </a:pPr>
+            <a:r>
+              <a:rPr lang="en-US" sz="2000" dirty="0"/>
+              <a:t>Lower administrative workload</a:t>
+            </a:r>
+          </a:p>
+          <a:p>
+            <a:pPr marL="457200" lvl="0" indent="-317500">
+              <a:buClr>
+                <a:srgbClr val="000000"/>
+              </a:buClr>
+              <a:buSzPts val="1400"/>
+              <a:buChar char="●"/>
+            </a:pPr>
+            <a:endParaRPr lang="en-US" sz="2000" dirty="0"/>
+          </a:p>
+          <a:p>
+            <a:pPr marL="457200" lvl="0" indent="-317500">
+              <a:buClr>
+                <a:srgbClr val="000000"/>
+              </a:buClr>
+              <a:buSzPts val="1400"/>
+              <a:buChar char="●"/>
+            </a:pPr>
+            <a:r>
+              <a:rPr lang="en-US" sz="2000" dirty="0"/>
+              <a:t>More focus on mentoring students </a:t>
+            </a:r>
+          </a:p>
+          <a:p>
+            <a:pPr marL="457200" lvl="0" indent="-317500">
+              <a:buClr>
+                <a:srgbClr val="000000"/>
+              </a:buClr>
+              <a:buSzPts val="1400"/>
+              <a:buChar char="●"/>
+            </a:pPr>
+            <a:endParaRPr lang="en-US" sz="2000" dirty="0"/>
+          </a:p>
+          <a:p>
+            <a:pPr>
+              <a:lnSpc>
+                <a:spcPct val="100000"/>
+              </a:lnSpc>
+              <a:spcBef>
+                <a:spcPts val="400"/>
+              </a:spcBef>
+            </a:pPr>
+            <a:endParaRPr lang="en-US" sz="1900" strike="noStrike" spc="-1" dirty="0">
+              <a:solidFill>
+                <a:srgbClr val="000000"/>
+              </a:solidFill>
+              <a:latin typeface="Calibri"/>
+            </a:endParaRPr>
+          </a:p>
+          <a:p>
+            <a:pPr>
+              <a:lnSpc>
+                <a:spcPct val="100000"/>
+              </a:lnSpc>
+              <a:spcBef>
+                <a:spcPts val="400"/>
+              </a:spcBef>
             </a:pPr>
             <a:endParaRPr lang="en-US" sz="1900" spc="-1" dirty="0">
               <a:solidFill>
@@ -4407,177 +4618,142 @@
             </a:endParaRPr>
           </a:p>
           <a:p>
-            <a:pPr marL="342900" indent="-342900">
+            <a:pPr>
               <a:lnSpc>
                 <a:spcPct val="150000"/>
               </a:lnSpc>
               <a:spcBef>
                 <a:spcPts val="400"/>
               </a:spcBef>
-              <a:buFont typeface="Arial" panose="020B0604020202020204" pitchFamily="34" charset="0"/>
-              <a:buChar char="•"/>
-            </a:pPr>
-            <a:endParaRPr lang="en-US" sz="1900" b="0" strike="noStrike" spc="-1" dirty="0">
-              <a:solidFill>
-                <a:srgbClr val="000000"/>
-              </a:solidFill>
-              <a:latin typeface="Calibri"/>
-            </a:endParaRPr>
-          </a:p>
-          <a:p>
-            <a:pPr marL="342900" indent="-342900">
+            </a:pPr>
+            <a:endParaRPr lang="en-US" sz="1900" b="0" strike="noStrike" spc="-1" dirty="0">
+              <a:solidFill>
+                <a:srgbClr val="000000"/>
+              </a:solidFill>
+              <a:latin typeface="Calibri"/>
+            </a:endParaRPr>
+          </a:p>
+          <a:p>
+            <a:pPr>
               <a:lnSpc>
                 <a:spcPct val="150000"/>
               </a:lnSpc>
               <a:spcBef>
                 <a:spcPts val="400"/>
               </a:spcBef>
-              <a:buFont typeface="Arial" panose="020B0604020202020204" pitchFamily="34" charset="0"/>
-              <a:buChar char="•"/>
-            </a:pPr>
-            <a:endParaRPr lang="en-US" sz="1900" b="0" strike="noStrike" spc="-1" dirty="0">
-              <a:solidFill>
-                <a:srgbClr val="000000"/>
-              </a:solidFill>
-              <a:latin typeface="Calibri"/>
-            </a:endParaRPr>
-          </a:p>
-          <a:p>
-            <a:pPr marL="342900" indent="-342900">
+            </a:pPr>
+            <a:endParaRPr lang="en-US" sz="1900" b="0" strike="noStrike" spc="-1" dirty="0">
+              <a:solidFill>
+                <a:srgbClr val="000000"/>
+              </a:solidFill>
+              <a:latin typeface="Calibri"/>
+            </a:endParaRPr>
+          </a:p>
+          <a:p>
+            <a:pPr>
               <a:lnSpc>
                 <a:spcPct val="150000"/>
               </a:lnSpc>
               <a:spcBef>
                 <a:spcPts val="400"/>
               </a:spcBef>
-              <a:buFont typeface="Arial" panose="020B0604020202020204" pitchFamily="34" charset="0"/>
-              <a:buChar char="•"/>
-            </a:pPr>
-            <a:endParaRPr lang="en-US" sz="1900" b="0" strike="noStrike" spc="-1" dirty="0">
-              <a:solidFill>
-                <a:srgbClr val="000000"/>
-              </a:solidFill>
-              <a:latin typeface="Calibri"/>
-            </a:endParaRPr>
-          </a:p>
-          <a:p>
-            <a:pPr marL="342900" indent="-342900">
+            </a:pPr>
+            <a:endParaRPr lang="en-US" sz="1900" b="0" strike="noStrike" spc="-1" dirty="0">
+              <a:solidFill>
+                <a:srgbClr val="000000"/>
+              </a:solidFill>
+              <a:latin typeface="Calibri"/>
+            </a:endParaRPr>
+          </a:p>
+          <a:p>
+            <a:pPr>
               <a:lnSpc>
                 <a:spcPct val="150000"/>
               </a:lnSpc>
               <a:spcBef>
                 <a:spcPts val="400"/>
               </a:spcBef>
-              <a:buFont typeface="Arial" panose="020B0604020202020204" pitchFamily="34" charset="0"/>
-              <a:buChar char="•"/>
-            </a:pPr>
-            <a:endParaRPr lang="en-US" sz="1900" b="0" strike="noStrike" spc="-1" dirty="0">
-              <a:solidFill>
-                <a:srgbClr val="000000"/>
-              </a:solidFill>
-              <a:latin typeface="Calibri"/>
-            </a:endParaRPr>
-          </a:p>
-          <a:p>
-            <a:pPr marL="342900" indent="-342900">
-              <a:lnSpc>
-                <a:spcPct val="100000"/>
-              </a:lnSpc>
-              <a:spcBef>
-                <a:spcPts val="400"/>
-              </a:spcBef>
-              <a:buFont typeface="Arial" panose="020B0604020202020204" pitchFamily="34" charset="0"/>
-              <a:buChar char="•"/>
-            </a:pPr>
-            <a:endParaRPr lang="en-US" sz="1900" b="0" strike="noStrike" spc="-1" dirty="0">
-              <a:solidFill>
-                <a:srgbClr val="000000"/>
-              </a:solidFill>
-              <a:latin typeface="Calibri"/>
-            </a:endParaRPr>
-          </a:p>
-          <a:p>
-            <a:pPr marL="342900" indent="-342900">
-              <a:lnSpc>
-                <a:spcPct val="100000"/>
-              </a:lnSpc>
-              <a:spcBef>
-                <a:spcPts val="400"/>
-              </a:spcBef>
-              <a:buFont typeface="Arial" panose="020B0604020202020204" pitchFamily="34" charset="0"/>
-              <a:buChar char="•"/>
-            </a:pPr>
-            <a:endParaRPr lang="en-US" sz="1900" b="0" strike="noStrike" spc="-1" dirty="0">
-              <a:solidFill>
-                <a:srgbClr val="000000"/>
-              </a:solidFill>
-              <a:latin typeface="Calibri"/>
-            </a:endParaRPr>
-          </a:p>
-          <a:p>
-            <a:pPr marL="342900" indent="-342900">
-              <a:lnSpc>
-                <a:spcPct val="100000"/>
-              </a:lnSpc>
-              <a:spcBef>
-                <a:spcPts val="400"/>
-              </a:spcBef>
-              <a:buFont typeface="Arial" panose="020B0604020202020204" pitchFamily="34" charset="0"/>
-              <a:buChar char="•"/>
-            </a:pPr>
-            <a:endParaRPr lang="en-US" sz="1900" b="0" strike="noStrike" spc="-1" dirty="0">
-              <a:solidFill>
-                <a:srgbClr val="000000"/>
-              </a:solidFill>
-              <a:latin typeface="Calibri"/>
-            </a:endParaRPr>
-          </a:p>
-          <a:p>
-            <a:pPr marL="342900" indent="-342900">
-              <a:lnSpc>
-                <a:spcPct val="100000"/>
-              </a:lnSpc>
-              <a:spcBef>
-                <a:spcPts val="400"/>
-              </a:spcBef>
-              <a:buFont typeface="Arial" panose="020B0604020202020204" pitchFamily="34" charset="0"/>
-              <a:buChar char="•"/>
-            </a:pPr>
-            <a:endParaRPr lang="en-US" sz="1900" b="0" strike="noStrike" spc="-1" dirty="0">
-              <a:solidFill>
-                <a:srgbClr val="000000"/>
-              </a:solidFill>
-              <a:latin typeface="Calibri"/>
-            </a:endParaRPr>
-          </a:p>
-          <a:p>
-            <a:pPr marL="342900" indent="-342900">
-              <a:lnSpc>
-                <a:spcPct val="100000"/>
-              </a:lnSpc>
-              <a:spcBef>
-                <a:spcPts val="400"/>
-              </a:spcBef>
-              <a:buFont typeface="Arial" panose="020B0604020202020204" pitchFamily="34" charset="0"/>
-              <a:buChar char="•"/>
-            </a:pPr>
-            <a:endParaRPr lang="en-US" sz="2000" dirty="0"/>
-          </a:p>
-          <a:p>
-            <a:pPr marL="342900" indent="-342900">
-              <a:lnSpc>
-                <a:spcPct val="100000"/>
-              </a:lnSpc>
-              <a:spcBef>
-                <a:spcPts val="400"/>
-              </a:spcBef>
-              <a:buFont typeface="Arial" panose="020B0604020202020204" pitchFamily="34" charset="0"/>
-              <a:buChar char="•"/>
-            </a:pPr>
-            <a:r>
-              <a:rPr lang="en-US" sz="2000" dirty="0"/>
-              <a:t>ChatGPT clearly outperforms in speed and completion rate</a:t>
-            </a:r>
+            </a:pPr>
+            <a:endParaRPr lang="en-US" sz="1900" b="0" strike="noStrike" spc="-1" dirty="0">
+              <a:solidFill>
+                <a:srgbClr val="000000"/>
+              </a:solidFill>
+              <a:latin typeface="Calibri"/>
+            </a:endParaRPr>
+          </a:p>
+          <a:p>
+            <a:pPr>
+              <a:lnSpc>
+                <a:spcPct val="100000"/>
+              </a:lnSpc>
+              <a:spcBef>
+                <a:spcPts val="400"/>
+              </a:spcBef>
+            </a:pPr>
+            <a:endParaRPr lang="en-US" sz="1900" b="0" strike="noStrike" spc="-1" dirty="0">
+              <a:solidFill>
+                <a:srgbClr val="000000"/>
+              </a:solidFill>
+              <a:latin typeface="Calibri"/>
+            </a:endParaRPr>
+          </a:p>
+          <a:p>
+            <a:pPr>
+              <a:lnSpc>
+                <a:spcPct val="100000"/>
+              </a:lnSpc>
+              <a:spcBef>
+                <a:spcPts val="400"/>
+              </a:spcBef>
+            </a:pPr>
+            <a:endParaRPr lang="en-US" sz="1900" b="0" strike="noStrike" spc="-1" dirty="0">
+              <a:solidFill>
+                <a:srgbClr val="000000"/>
+              </a:solidFill>
+              <a:latin typeface="Calibri"/>
+            </a:endParaRPr>
+          </a:p>
+          <a:p>
+            <a:pPr>
+              <a:lnSpc>
+                <a:spcPct val="100000"/>
+              </a:lnSpc>
+              <a:spcBef>
+                <a:spcPts val="400"/>
+              </a:spcBef>
+            </a:pPr>
+            <a:endParaRPr lang="en-US" sz="1900" b="0" strike="noStrike" spc="-1" dirty="0">
+              <a:solidFill>
+                <a:srgbClr val="000000"/>
+              </a:solidFill>
+              <a:latin typeface="Calibri"/>
+            </a:endParaRPr>
+          </a:p>
+          <a:p>
+            <a:pPr>
+              <a:lnSpc>
+                <a:spcPct val="100000"/>
+              </a:lnSpc>
+              <a:spcBef>
+                <a:spcPts val="400"/>
+              </a:spcBef>
+            </a:pPr>
+            <a:endParaRPr lang="en-US" sz="1900" b="0" strike="noStrike" spc="-1" dirty="0">
+              <a:solidFill>
+                <a:srgbClr val="000000"/>
+              </a:solidFill>
+              <a:latin typeface="Calibri"/>
+            </a:endParaRPr>
+          </a:p>
+          <a:p>
+            <a:pPr>
+              <a:lnSpc>
+                <a:spcPct val="100000"/>
+              </a:lnSpc>
+              <a:spcBef>
+                <a:spcPts val="400"/>
+              </a:spcBef>
+            </a:pPr>
             <a:endParaRPr lang="en-US" sz="1900" b="0" strike="noStrike" spc="-1" dirty="0">
               <a:solidFill>
                 <a:srgbClr val="000000"/>
@@ -4587,417 +4763,51 @@
           </a:p>
         </p:txBody>
       </p:sp>
-      <p:graphicFrame>
-        <p:nvGraphicFramePr>
-          <p:cNvPr id="3" name="Table 2">
+      <p:pic>
+        <p:nvPicPr>
+          <p:cNvPr id="4" name="Picture 3">
             <a:extLst>
               <a:ext uri="{FF2B5EF4-FFF2-40B4-BE49-F238E27FC236}">
-                <a16:creationId xmlns:a16="http://schemas.microsoft.com/office/drawing/2014/main" id="{219A838A-911F-B350-3636-8C6346332130}"/>
+                <a16:creationId xmlns:a16="http://schemas.microsoft.com/office/drawing/2014/main" id="{019247A1-4140-8AA7-87AF-C4828AD6E611}"/>
               </a:ext>
             </a:extLst>
           </p:cNvPr>
-          <p:cNvGraphicFramePr>
-            <a:graphicFrameLocks noGrp="1"/>
-          </p:cNvGraphicFramePr>
-          <p:nvPr>
-            <p:extLst>
-              <p:ext uri="{D42A27DB-BD31-4B8C-83A1-F6EECF244321}">
-                <p14:modId xmlns:p14="http://schemas.microsoft.com/office/powerpoint/2010/main" val="1309875936"/>
-              </p:ext>
-            </p:extLst>
-          </p:nvPr>
-        </p:nvGraphicFramePr>
-        <p:xfrm>
-          <a:off x="457200" y="1706880"/>
-          <a:ext cx="8229600" cy="3828288"/>
-        </p:xfrm>
-        <a:graphic>
-          <a:graphicData uri="http://schemas.openxmlformats.org/drawingml/2006/table">
-            <a:tbl>
-              <a:tblPr/>
-              <a:tblGrid>
-                <a:gridCol w="2743200">
-                  <a:extLst>
-                    <a:ext uri="{9D8B030D-6E8A-4147-A177-3AD203B41FA5}">
-                      <a16:colId xmlns:a16="http://schemas.microsoft.com/office/drawing/2014/main" val="2381444573"/>
-                    </a:ext>
-                  </a:extLst>
-                </a:gridCol>
-                <a:gridCol w="2743200">
-                  <a:extLst>
-                    <a:ext uri="{9D8B030D-6E8A-4147-A177-3AD203B41FA5}">
-                      <a16:colId xmlns:a16="http://schemas.microsoft.com/office/drawing/2014/main" val="2407075010"/>
-                    </a:ext>
-                  </a:extLst>
-                </a:gridCol>
-                <a:gridCol w="2743200">
-                  <a:extLst>
-                    <a:ext uri="{9D8B030D-6E8A-4147-A177-3AD203B41FA5}">
-                      <a16:colId xmlns:a16="http://schemas.microsoft.com/office/drawing/2014/main" val="75282224"/>
-                    </a:ext>
-                  </a:extLst>
-                </a:gridCol>
-              </a:tblGrid>
-              <a:tr h="957072">
-                <a:tc>
-                  <a:txBody>
-                    <a:bodyPr/>
-                    <a:lstStyle/>
-                    <a:p>
-                      <a:r>
-                        <a:rPr lang="en-IN" dirty="0"/>
-                        <a:t>Tool</a:t>
-                      </a:r>
-                    </a:p>
-                  </a:txBody>
-                  <a:tcPr anchor="ctr">
-                    <a:lnL>
-                      <a:noFill/>
-                    </a:lnL>
-                    <a:lnR>
-                      <a:noFill/>
-                    </a:lnR>
-                    <a:lnT>
-                      <a:noFill/>
-                    </a:lnT>
-                    <a:lnB>
-                      <a:noFill/>
-                    </a:lnB>
-                    <a:noFill/>
-                  </a:tcPr>
-                </a:tc>
-                <a:tc>
-                  <a:txBody>
-                    <a:bodyPr/>
-                    <a:lstStyle/>
-                    <a:p>
-                      <a:r>
-                        <a:rPr lang="en-IN"/>
-                        <a:t>Response Time</a:t>
-                      </a:r>
-                    </a:p>
-                  </a:txBody>
-                  <a:tcPr anchor="ctr">
-                    <a:lnL>
-                      <a:noFill/>
-                    </a:lnL>
-                    <a:lnR>
-                      <a:noFill/>
-                    </a:lnR>
-                    <a:lnT>
-                      <a:noFill/>
-                    </a:lnT>
-                    <a:lnB>
-                      <a:noFill/>
-                    </a:lnB>
-                    <a:noFill/>
-                  </a:tcPr>
-                </a:tc>
-                <a:tc>
-                  <a:txBody>
-                    <a:bodyPr/>
-                    <a:lstStyle/>
-                    <a:p>
-                      <a:r>
-                        <a:rPr lang="en-IN" dirty="0"/>
-                        <a:t>Completion Rate</a:t>
-                      </a:r>
-                    </a:p>
-                  </a:txBody>
-                  <a:tcPr anchor="ctr">
-                    <a:lnL>
-                      <a:noFill/>
-                    </a:lnL>
-                    <a:lnR>
-                      <a:noFill/>
-                    </a:lnR>
-                    <a:lnT>
-                      <a:noFill/>
-                    </a:lnT>
-                    <a:lnB>
-                      <a:noFill/>
-                    </a:lnB>
-                    <a:noFill/>
-                  </a:tcPr>
-                </a:tc>
-                <a:extLst>
-                  <a:ext uri="{0D108BD9-81ED-4DB2-BD59-A6C34878D82A}">
-                    <a16:rowId xmlns:a16="http://schemas.microsoft.com/office/drawing/2014/main" val="1434618266"/>
-                  </a:ext>
-                </a:extLst>
-              </a:tr>
-              <a:tr h="957072">
-                <a:tc>
-                  <a:txBody>
-                    <a:bodyPr/>
-                    <a:lstStyle/>
-                    <a:p>
-                      <a:r>
-                        <a:rPr lang="en-IN" dirty="0"/>
-                        <a:t>ChatGPT</a:t>
-                      </a:r>
-                    </a:p>
-                  </a:txBody>
-                  <a:tcPr anchor="ctr">
-                    <a:lnL>
-                      <a:noFill/>
-                    </a:lnL>
-                    <a:lnR>
-                      <a:noFill/>
-                    </a:lnR>
-                    <a:lnT>
-                      <a:noFill/>
-                    </a:lnT>
-                    <a:lnB>
-                      <a:noFill/>
-                    </a:lnB>
-                    <a:noFill/>
-                  </a:tcPr>
-                </a:tc>
-                <a:tc>
-                  <a:txBody>
-                    <a:bodyPr/>
-                    <a:lstStyle/>
-                    <a:p>
-                      <a:r>
-                        <a:rPr lang="en-IN"/>
-                        <a:t>3.2 sec</a:t>
-                      </a:r>
-                    </a:p>
-                  </a:txBody>
-                  <a:tcPr anchor="ctr">
-                    <a:lnL>
-                      <a:noFill/>
-                    </a:lnL>
-                    <a:lnR>
-                      <a:noFill/>
-                    </a:lnR>
-                    <a:lnT>
-                      <a:noFill/>
-                    </a:lnT>
-                    <a:lnB>
-                      <a:noFill/>
-                    </a:lnB>
-                    <a:noFill/>
-                  </a:tcPr>
-                </a:tc>
-                <a:tc>
-                  <a:txBody>
-                    <a:bodyPr/>
-                    <a:lstStyle/>
-                    <a:p>
-                      <a:r>
-                        <a:rPr lang="en-IN"/>
-                        <a:t>94%</a:t>
-                      </a:r>
-                    </a:p>
-                  </a:txBody>
-                  <a:tcPr anchor="ctr">
-                    <a:lnL>
-                      <a:noFill/>
-                    </a:lnL>
-                    <a:lnR>
-                      <a:noFill/>
-                    </a:lnR>
-                    <a:lnT>
-                      <a:noFill/>
-                    </a:lnT>
-                    <a:lnB>
-                      <a:noFill/>
-                    </a:lnB>
-                    <a:noFill/>
-                  </a:tcPr>
-                </a:tc>
-                <a:extLst>
-                  <a:ext uri="{0D108BD9-81ED-4DB2-BD59-A6C34878D82A}">
-                    <a16:rowId xmlns:a16="http://schemas.microsoft.com/office/drawing/2014/main" val="1267640282"/>
-                  </a:ext>
-                </a:extLst>
-              </a:tr>
-              <a:tr h="957072">
-                <a:tc>
-                  <a:txBody>
-                    <a:bodyPr/>
-                    <a:lstStyle/>
-                    <a:p>
-                      <a:r>
-                        <a:rPr lang="en-IN"/>
-                        <a:t>ITS</a:t>
-                      </a:r>
-                    </a:p>
-                  </a:txBody>
-                  <a:tcPr anchor="ctr">
-                    <a:lnL>
-                      <a:noFill/>
-                    </a:lnL>
-                    <a:lnR>
-                      <a:noFill/>
-                    </a:lnR>
-                    <a:lnT>
-                      <a:noFill/>
-                    </a:lnT>
-                    <a:lnB>
-                      <a:noFill/>
-                    </a:lnB>
-                    <a:noFill/>
-                  </a:tcPr>
-                </a:tc>
-                <a:tc>
-                  <a:txBody>
-                    <a:bodyPr/>
-                    <a:lstStyle/>
-                    <a:p>
-                      <a:r>
-                        <a:rPr lang="en-IN"/>
-                        <a:t>5.6 sec</a:t>
-                      </a:r>
-                    </a:p>
-                  </a:txBody>
-                  <a:tcPr anchor="ctr">
-                    <a:lnL>
-                      <a:noFill/>
-                    </a:lnL>
-                    <a:lnR>
-                      <a:noFill/>
-                    </a:lnR>
-                    <a:lnT>
-                      <a:noFill/>
-                    </a:lnT>
-                    <a:lnB>
-                      <a:noFill/>
-                    </a:lnB>
-                    <a:noFill/>
-                  </a:tcPr>
-                </a:tc>
-                <a:tc>
-                  <a:txBody>
-                    <a:bodyPr/>
-                    <a:lstStyle/>
-                    <a:p>
-                      <a:r>
-                        <a:rPr lang="en-IN"/>
-                        <a:t>88%</a:t>
-                      </a:r>
-                    </a:p>
-                  </a:txBody>
-                  <a:tcPr anchor="ctr">
-                    <a:lnL>
-                      <a:noFill/>
-                    </a:lnL>
-                    <a:lnR>
-                      <a:noFill/>
-                    </a:lnR>
-                    <a:lnT>
-                      <a:noFill/>
-                    </a:lnT>
-                    <a:lnB>
-                      <a:noFill/>
-                    </a:lnB>
-                    <a:noFill/>
-                  </a:tcPr>
-                </a:tc>
-                <a:extLst>
-                  <a:ext uri="{0D108BD9-81ED-4DB2-BD59-A6C34878D82A}">
-                    <a16:rowId xmlns:a16="http://schemas.microsoft.com/office/drawing/2014/main" val="559443005"/>
-                  </a:ext>
-                </a:extLst>
-              </a:tr>
-              <a:tr h="957072">
-                <a:tc>
-                  <a:txBody>
-                    <a:bodyPr/>
-                    <a:lstStyle/>
-                    <a:p>
-                      <a:r>
-                        <a:rPr lang="en-IN" dirty="0"/>
-                        <a:t>AI Platform</a:t>
-                      </a:r>
-                    </a:p>
-                  </a:txBody>
-                  <a:tcPr anchor="ctr">
-                    <a:lnL>
-                      <a:noFill/>
-                    </a:lnL>
-                    <a:lnR>
-                      <a:noFill/>
-                    </a:lnR>
-                    <a:lnT>
-                      <a:noFill/>
-                    </a:lnT>
-                    <a:lnB>
-                      <a:noFill/>
-                    </a:lnB>
-                    <a:noFill/>
-                  </a:tcPr>
-                </a:tc>
-                <a:tc>
-                  <a:txBody>
-                    <a:bodyPr/>
-                    <a:lstStyle/>
-                    <a:p>
-                      <a:r>
-                        <a:rPr lang="en-IN"/>
-                        <a:t>6.9 sec</a:t>
-                      </a:r>
-                    </a:p>
-                  </a:txBody>
-                  <a:tcPr anchor="ctr">
-                    <a:lnL>
-                      <a:noFill/>
-                    </a:lnL>
-                    <a:lnR>
-                      <a:noFill/>
-                    </a:lnR>
-                    <a:lnT>
-                      <a:noFill/>
-                    </a:lnT>
-                    <a:lnB>
-                      <a:noFill/>
-                    </a:lnB>
-                    <a:noFill/>
-                  </a:tcPr>
-                </a:tc>
-                <a:tc>
-                  <a:txBody>
-                    <a:bodyPr/>
-                    <a:lstStyle/>
-                    <a:p>
-                      <a:r>
-                        <a:rPr lang="en-IN" dirty="0"/>
-                        <a:t>85%</a:t>
-                      </a:r>
-                    </a:p>
-                  </a:txBody>
-                  <a:tcPr anchor="ctr">
-                    <a:lnL>
-                      <a:noFill/>
-                    </a:lnL>
-                    <a:lnR>
-                      <a:noFill/>
-                    </a:lnR>
-                    <a:lnT>
-                      <a:noFill/>
-                    </a:lnT>
-                    <a:lnB>
-                      <a:noFill/>
-                    </a:lnB>
-                    <a:noFill/>
-                  </a:tcPr>
-                </a:tc>
-                <a:extLst>
-                  <a:ext uri="{0D108BD9-81ED-4DB2-BD59-A6C34878D82A}">
-                    <a16:rowId xmlns:a16="http://schemas.microsoft.com/office/drawing/2014/main" val="1353713124"/>
-                  </a:ext>
-                </a:extLst>
-              </a:tr>
-            </a:tbl>
-          </a:graphicData>
-        </a:graphic>
-      </p:graphicFrame>
+          <p:cNvPicPr>
+            <a:picLocks noChangeAspect="1"/>
+          </p:cNvPicPr>
+          <p:nvPr/>
+        </p:nvPicPr>
+        <p:blipFill>
+          <a:blip r:embed="rId2">
+            <a:extLst>
+              <a:ext uri="{28A0092B-C50C-407E-A947-70E740481C1C}">
+                <a14:useLocalDpi xmlns:a14="http://schemas.microsoft.com/office/drawing/2010/main" val="0"/>
+              </a:ext>
+            </a:extLst>
+          </a:blip>
+          <a:srcRect/>
+          <a:stretch>
+            <a:fillRect/>
+          </a:stretch>
+        </p:blipFill>
+        <p:spPr bwMode="auto">
+          <a:xfrm>
+            <a:off x="4534146" y="2898656"/>
+            <a:ext cx="4609854" cy="3457864"/>
+          </a:xfrm>
+          <a:prstGeom prst="rect">
+            <a:avLst/>
+          </a:prstGeom>
+          <a:noFill/>
+          <a:ln>
+            <a:noFill/>
+          </a:ln>
+        </p:spPr>
+      </p:pic>
     </p:spTree>
     <p:extLst>
       <p:ext uri="{BB962C8B-B14F-4D97-AF65-F5344CB8AC3E}">
-        <p14:creationId xmlns:p14="http://schemas.microsoft.com/office/powerpoint/2010/main" val="717408951"/>
+        <p14:creationId xmlns:p14="http://schemas.microsoft.com/office/powerpoint/2010/main" val="1071535245"/>
       </p:ext>
     </p:extLst>
   </p:cSld>
@@ -5059,7 +4869,7 @@
                 <a:latin typeface="Times New Roman" panose="02020603050405020304" pitchFamily="18" charset="0"/>
                 <a:cs typeface="Times New Roman" panose="02020603050405020304" pitchFamily="18" charset="0"/>
               </a:rPr>
-              <a:t>Results – Qualitative Score </a:t>
+              <a:t>Impact on Institutions  </a:t>
             </a:r>
             <a:endParaRPr lang="en-US" sz="3000" b="0" strike="noStrike" spc="-1" dirty="0">
               <a:solidFill>
@@ -5165,23 +4975,180 @@
             </a:endParaRPr>
           </a:p>
           <a:p>
-            <a:pPr>
-              <a:lnSpc>
-                <a:spcPct val="100000"/>
-              </a:lnSpc>
-              <a:spcBef>
-                <a:spcPts val="400"/>
-              </a:spcBef>
-            </a:pPr>
-            <a:r>
-              <a:rPr lang="en-US" sz="1900" b="0" strike="noStrike" spc="-1" dirty="0">
+            <a:pPr marL="139700" lvl="0">
+              <a:buClr>
+                <a:srgbClr val="000000"/>
+              </a:buClr>
+              <a:buSzPts val="1400"/>
+            </a:pPr>
+            <a:r>
+              <a:rPr lang="en-IN" sz="2000" dirty="0"/>
+              <a:t>AI enables institutes to:</a:t>
+            </a:r>
+          </a:p>
+          <a:p>
+            <a:pPr marL="457200" lvl="0" indent="-317500">
+              <a:buClr>
+                <a:srgbClr val="000000"/>
+              </a:buClr>
+              <a:buSzPts val="1400"/>
+              <a:buChar char="●"/>
+            </a:pPr>
+            <a:endParaRPr lang="en-US" sz="2000" dirty="0"/>
+          </a:p>
+          <a:p>
+            <a:pPr marL="457200" lvl="0" indent="-317500">
+              <a:buClr>
+                <a:srgbClr val="000000"/>
+              </a:buClr>
+              <a:buSzPts val="1400"/>
+              <a:buChar char="●"/>
+            </a:pPr>
+            <a:r>
+              <a:rPr lang="en-US" sz="2000" dirty="0"/>
+              <a:t>Make data-driven decisions</a:t>
+            </a:r>
+          </a:p>
+          <a:p>
+            <a:pPr marL="457200" lvl="0" indent="-317500">
+              <a:buClr>
+                <a:srgbClr val="000000"/>
+              </a:buClr>
+              <a:buSzPts val="1400"/>
+              <a:buChar char="●"/>
+            </a:pPr>
+            <a:endParaRPr lang="en-US" sz="2000" dirty="0"/>
+          </a:p>
+          <a:p>
+            <a:pPr marL="457200" lvl="0" indent="-317500">
+              <a:buClr>
+                <a:srgbClr val="000000"/>
+              </a:buClr>
+              <a:buSzPts val="1400"/>
+              <a:buChar char="●"/>
+            </a:pPr>
+            <a:r>
+              <a:rPr lang="en-US" sz="2000" dirty="0"/>
+              <a:t>Improve curriculum design </a:t>
+            </a:r>
+          </a:p>
+          <a:p>
+            <a:pPr marL="457200" lvl="0" indent="-317500">
+              <a:buClr>
+                <a:srgbClr val="000000"/>
+              </a:buClr>
+              <a:buSzPts val="1400"/>
+              <a:buChar char="●"/>
+            </a:pPr>
+            <a:endParaRPr lang="en-IN" sz="2000" dirty="0"/>
+          </a:p>
+          <a:p>
+            <a:pPr marL="457200" lvl="0" indent="-317500">
+              <a:buClr>
+                <a:srgbClr val="000000"/>
+              </a:buClr>
+              <a:buSzPts val="1400"/>
+              <a:buChar char="●"/>
+            </a:pPr>
+            <a:r>
+              <a:rPr lang="en-US" sz="2000" dirty="0">
                 <a:solidFill>
                   <a:srgbClr val="000000"/>
                 </a:solidFill>
-                <a:latin typeface="Calibri"/>
+                <a:ea typeface="Calibri" panose="020F0502020204030204" pitchFamily="34" charset="0"/>
+                <a:cs typeface="Times New Roman" panose="02020603050405020304" pitchFamily="18" charset="0"/>
               </a:rPr>
-              <a:t> </a:t>
-            </a:r>
+              <a:t>Identify weak students early </a:t>
+            </a:r>
+          </a:p>
+          <a:p>
+            <a:pPr marL="457200" lvl="0" indent="-317500">
+              <a:buClr>
+                <a:srgbClr val="000000"/>
+              </a:buClr>
+              <a:buSzPts val="1400"/>
+              <a:buChar char="●"/>
+            </a:pPr>
+            <a:endParaRPr lang="en-US" sz="2000" dirty="0">
+              <a:solidFill>
+                <a:srgbClr val="000000"/>
+              </a:solidFill>
+              <a:ea typeface="Calibri" panose="020F0502020204030204" pitchFamily="34" charset="0"/>
+              <a:cs typeface="Times New Roman" panose="02020603050405020304" pitchFamily="18" charset="0"/>
+            </a:endParaRPr>
+          </a:p>
+          <a:p>
+            <a:pPr marL="457200" lvl="0" indent="-317500">
+              <a:buClr>
+                <a:srgbClr val="000000"/>
+              </a:buClr>
+              <a:buSzPts val="1400"/>
+              <a:buChar char="●"/>
+            </a:pPr>
+            <a:r>
+              <a:rPr lang="en-US" sz="2000" dirty="0">
+                <a:solidFill>
+                  <a:srgbClr val="000000"/>
+                </a:solidFill>
+                <a:ea typeface="Calibri" panose="020F0502020204030204" pitchFamily="34" charset="0"/>
+                <a:cs typeface="Times New Roman" panose="02020603050405020304" pitchFamily="18" charset="0"/>
+              </a:rPr>
+              <a:t>Scale education to larger audiences </a:t>
+            </a:r>
+          </a:p>
+          <a:p>
+            <a:pPr marL="457200" lvl="0" indent="-317500">
+              <a:buClr>
+                <a:srgbClr val="000000"/>
+              </a:buClr>
+              <a:buSzPts val="1400"/>
+              <a:buChar char="●"/>
+            </a:pPr>
+            <a:endParaRPr lang="en-US" sz="2000" dirty="0">
+              <a:solidFill>
+                <a:srgbClr val="000000"/>
+              </a:solidFill>
+              <a:ea typeface="Calibri" panose="020F0502020204030204" pitchFamily="34" charset="0"/>
+              <a:cs typeface="Times New Roman" panose="02020603050405020304" pitchFamily="18" charset="0"/>
+            </a:endParaRPr>
+          </a:p>
+          <a:p>
+            <a:pPr marL="139700" lvl="0">
+              <a:buClr>
+                <a:srgbClr val="000000"/>
+              </a:buClr>
+              <a:buSzPts val="1400"/>
+            </a:pPr>
+            <a:r>
+              <a:rPr lang="en-US" sz="2000" dirty="0">
+                <a:solidFill>
+                  <a:srgbClr val="000000"/>
+                </a:solidFill>
+                <a:ea typeface="Calibri" panose="020F0502020204030204" pitchFamily="34" charset="0"/>
+                <a:cs typeface="Times New Roman" panose="02020603050405020304" pitchFamily="18" charset="0"/>
+              </a:rPr>
+              <a:t>It transforms education into a more efficient and intelligent system.</a:t>
+            </a:r>
+            <a:endParaRPr lang="en-US" sz="3600" dirty="0">
+              <a:ea typeface="Calibri" panose="020F0502020204030204" pitchFamily="34" charset="0"/>
+              <a:cs typeface="Times New Roman" panose="02020603050405020304" pitchFamily="18" charset="0"/>
+            </a:endParaRPr>
+          </a:p>
+          <a:p>
+            <a:pPr>
+              <a:lnSpc>
+                <a:spcPct val="100000"/>
+              </a:lnSpc>
+              <a:spcBef>
+                <a:spcPts val="400"/>
+              </a:spcBef>
+            </a:pPr>
+            <a:endParaRPr lang="en-US" sz="1900" b="0" strike="noStrike" spc="-1" dirty="0">
+              <a:solidFill>
+                <a:srgbClr val="000000"/>
+              </a:solidFill>
+              <a:latin typeface="Calibri"/>
+            </a:endParaRPr>
           </a:p>
           <a:p>
             <a:pPr>
@@ -5320,28 +5287,6 @@
                 <a:spcPts val="400"/>
               </a:spcBef>
             </a:pPr>
-            <a:endParaRPr lang="en-US" sz="1900" b="0" strike="noStrike" spc="-1" dirty="0">
-              <a:solidFill>
-                <a:srgbClr val="000000"/>
-              </a:solidFill>
-              <a:latin typeface="Calibri"/>
-            </a:endParaRPr>
-          </a:p>
-          <a:p>
-            <a:pPr marL="342900" indent="-342900">
-              <a:lnSpc>
-                <a:spcPct val="100000"/>
-              </a:lnSpc>
-              <a:spcBef>
-                <a:spcPts val="400"/>
-              </a:spcBef>
-              <a:buFont typeface="Arial" panose="020B0604020202020204" pitchFamily="34" charset="0"/>
-              <a:buChar char="•"/>
-            </a:pPr>
-            <a:r>
-              <a:rPr lang="en-US" sz="2000" dirty="0"/>
-              <a:t>ChatGPT achieved the highest overall performance score</a:t>
-            </a:r>
             <a:endParaRPr lang="en-US" sz="1900" b="0" strike="noStrike" spc="-1" dirty="0">
               <a:solidFill>
                 <a:srgbClr val="000000"/>
@@ -5367,302 +5312,10 @@
           </a:p>
         </p:txBody>
       </p:sp>
-      <p:graphicFrame>
-        <p:nvGraphicFramePr>
-          <p:cNvPr id="3" name="Table 2">
-            <a:extLst>
-              <a:ext uri="{FF2B5EF4-FFF2-40B4-BE49-F238E27FC236}">
-                <a16:creationId xmlns:a16="http://schemas.microsoft.com/office/drawing/2014/main" id="{4C2F5D97-B591-7140-19C1-96C5F4D7F334}"/>
-              </a:ext>
-            </a:extLst>
-          </p:cNvPr>
-          <p:cNvGraphicFramePr>
-            <a:graphicFrameLocks noGrp="1"/>
-          </p:cNvGraphicFramePr>
-          <p:nvPr>
-            <p:extLst>
-              <p:ext uri="{D42A27DB-BD31-4B8C-83A1-F6EECF244321}">
-                <p14:modId xmlns:p14="http://schemas.microsoft.com/office/powerpoint/2010/main" val="2998763993"/>
-              </p:ext>
-            </p:extLst>
-          </p:nvPr>
-        </p:nvGraphicFramePr>
-        <p:xfrm>
-          <a:off x="457200" y="1767840"/>
-          <a:ext cx="8229600" cy="3048000"/>
-        </p:xfrm>
-        <a:graphic>
-          <a:graphicData uri="http://schemas.openxmlformats.org/drawingml/2006/table">
-            <a:tbl>
-              <a:tblPr/>
-              <a:tblGrid>
-                <a:gridCol w="4114800">
-                  <a:extLst>
-                    <a:ext uri="{9D8B030D-6E8A-4147-A177-3AD203B41FA5}">
-                      <a16:colId xmlns:a16="http://schemas.microsoft.com/office/drawing/2014/main" val="3733588320"/>
-                    </a:ext>
-                  </a:extLst>
-                </a:gridCol>
-                <a:gridCol w="4114800">
-                  <a:extLst>
-                    <a:ext uri="{9D8B030D-6E8A-4147-A177-3AD203B41FA5}">
-                      <a16:colId xmlns:a16="http://schemas.microsoft.com/office/drawing/2014/main" val="1803505233"/>
-                    </a:ext>
-                  </a:extLst>
-                </a:gridCol>
-              </a:tblGrid>
-              <a:tr h="762000">
-                <a:tc>
-                  <a:txBody>
-                    <a:bodyPr/>
-                    <a:lstStyle/>
-                    <a:p>
-                      <a:r>
-                        <a:rPr lang="en-IN" dirty="0"/>
-                        <a:t>Tool</a:t>
-                      </a:r>
-                    </a:p>
-                  </a:txBody>
-                  <a:tcPr anchor="ctr">
-                    <a:lnL>
-                      <a:noFill/>
-                    </a:lnL>
-                    <a:lnR>
-                      <a:noFill/>
-                    </a:lnR>
-                    <a:lnT>
-                      <a:noFill/>
-                    </a:lnT>
-                    <a:lnB>
-                      <a:noFill/>
-                    </a:lnB>
-                    <a:noFill/>
-                  </a:tcPr>
-                </a:tc>
-                <a:tc>
-                  <a:txBody>
-                    <a:bodyPr/>
-                    <a:lstStyle/>
-                    <a:p>
-                      <a:r>
-                        <a:rPr lang="en-IN"/>
-                        <a:t>Score</a:t>
-                      </a:r>
-                    </a:p>
-                  </a:txBody>
-                  <a:tcPr anchor="ctr">
-                    <a:lnL>
-                      <a:noFill/>
-                    </a:lnL>
-                    <a:lnR>
-                      <a:noFill/>
-                    </a:lnR>
-                    <a:lnT>
-                      <a:noFill/>
-                    </a:lnT>
-                    <a:lnB>
-                      <a:noFill/>
-                    </a:lnB>
-                    <a:noFill/>
-                  </a:tcPr>
-                </a:tc>
-                <a:extLst>
-                  <a:ext uri="{0D108BD9-81ED-4DB2-BD59-A6C34878D82A}">
-                    <a16:rowId xmlns:a16="http://schemas.microsoft.com/office/drawing/2014/main" val="2093495644"/>
-                  </a:ext>
-                </a:extLst>
-              </a:tr>
-              <a:tr h="762000">
-                <a:tc>
-                  <a:txBody>
-                    <a:bodyPr/>
-                    <a:lstStyle/>
-                    <a:p>
-                      <a:r>
-                        <a:rPr lang="en-IN" dirty="0"/>
-                        <a:t>ChatGPT</a:t>
-                      </a:r>
-                    </a:p>
-                  </a:txBody>
-                  <a:tcPr anchor="ctr">
-                    <a:lnL>
-                      <a:noFill/>
-                    </a:lnL>
-                    <a:lnR>
-                      <a:noFill/>
-                    </a:lnR>
-                    <a:lnT>
-                      <a:noFill/>
-                    </a:lnT>
-                    <a:lnB>
-                      <a:noFill/>
-                    </a:lnB>
-                    <a:noFill/>
-                  </a:tcPr>
-                </a:tc>
-                <a:tc>
-                  <a:txBody>
-                    <a:bodyPr/>
-                    <a:lstStyle/>
-                    <a:p>
-                      <a:r>
-                        <a:rPr lang="en-IN"/>
-                        <a:t>46/50</a:t>
-                      </a:r>
-                    </a:p>
-                  </a:txBody>
-                  <a:tcPr anchor="ctr">
-                    <a:lnL>
-                      <a:noFill/>
-                    </a:lnL>
-                    <a:lnR>
-                      <a:noFill/>
-                    </a:lnR>
-                    <a:lnT>
-                      <a:noFill/>
-                    </a:lnT>
-                    <a:lnB>
-                      <a:noFill/>
-                    </a:lnB>
-                    <a:noFill/>
-                  </a:tcPr>
-                </a:tc>
-                <a:extLst>
-                  <a:ext uri="{0D108BD9-81ED-4DB2-BD59-A6C34878D82A}">
-                    <a16:rowId xmlns:a16="http://schemas.microsoft.com/office/drawing/2014/main" val="937677722"/>
-                  </a:ext>
-                </a:extLst>
-              </a:tr>
-              <a:tr h="762000">
-                <a:tc>
-                  <a:txBody>
-                    <a:bodyPr/>
-                    <a:lstStyle/>
-                    <a:p>
-                      <a:r>
-                        <a:rPr lang="en-IN"/>
-                        <a:t>ITS</a:t>
-                      </a:r>
-                    </a:p>
-                  </a:txBody>
-                  <a:tcPr anchor="ctr">
-                    <a:lnL>
-                      <a:noFill/>
-                    </a:lnL>
-                    <a:lnR>
-                      <a:noFill/>
-                    </a:lnR>
-                    <a:lnT>
-                      <a:noFill/>
-                    </a:lnT>
-                    <a:lnB>
-                      <a:noFill/>
-                    </a:lnB>
-                    <a:noFill/>
-                  </a:tcPr>
-                </a:tc>
-                <a:tc>
-                  <a:txBody>
-                    <a:bodyPr/>
-                    <a:lstStyle/>
-                    <a:p>
-                      <a:r>
-                        <a:rPr lang="en-IN"/>
-                        <a:t>39/50</a:t>
-                      </a:r>
-                    </a:p>
-                  </a:txBody>
-                  <a:tcPr anchor="ctr">
-                    <a:lnL>
-                      <a:noFill/>
-                    </a:lnL>
-                    <a:lnR>
-                      <a:noFill/>
-                    </a:lnR>
-                    <a:lnT>
-                      <a:noFill/>
-                    </a:lnT>
-                    <a:lnB>
-                      <a:noFill/>
-                    </a:lnB>
-                    <a:noFill/>
-                  </a:tcPr>
-                </a:tc>
-                <a:extLst>
-                  <a:ext uri="{0D108BD9-81ED-4DB2-BD59-A6C34878D82A}">
-                    <a16:rowId xmlns:a16="http://schemas.microsoft.com/office/drawing/2014/main" val="3196168614"/>
-                  </a:ext>
-                </a:extLst>
-              </a:tr>
-              <a:tr h="762000">
-                <a:tc>
-                  <a:txBody>
-                    <a:bodyPr/>
-                    <a:lstStyle/>
-                    <a:p>
-                      <a:r>
-                        <a:rPr lang="en-IN"/>
-                        <a:t>AI Platform</a:t>
-                      </a:r>
-                    </a:p>
-                  </a:txBody>
-                  <a:tcPr anchor="ctr">
-                    <a:lnL>
-                      <a:noFill/>
-                    </a:lnL>
-                    <a:lnR>
-                      <a:noFill/>
-                    </a:lnR>
-                    <a:lnT>
-                      <a:noFill/>
-                    </a:lnT>
-                    <a:lnB>
-                      <a:noFill/>
-                    </a:lnB>
-                    <a:noFill/>
-                  </a:tcPr>
-                </a:tc>
-                <a:tc>
-                  <a:txBody>
-                    <a:bodyPr/>
-                    <a:lstStyle/>
-                    <a:p>
-                      <a:r>
-                        <a:rPr lang="en-IN" dirty="0"/>
-                        <a:t>37/50</a:t>
-                      </a:r>
-                    </a:p>
-                  </a:txBody>
-                  <a:tcPr anchor="ctr">
-                    <a:lnL>
-                      <a:noFill/>
-                    </a:lnL>
-                    <a:lnR>
-                      <a:noFill/>
-                    </a:lnR>
-                    <a:lnT>
-                      <a:noFill/>
-                    </a:lnT>
-                    <a:lnB>
-                      <a:noFill/>
-                    </a:lnB>
-                    <a:noFill/>
-                  </a:tcPr>
-                </a:tc>
-                <a:extLst>
-                  <a:ext uri="{0D108BD9-81ED-4DB2-BD59-A6C34878D82A}">
-                    <a16:rowId xmlns:a16="http://schemas.microsoft.com/office/drawing/2014/main" val="31357494"/>
-                  </a:ext>
-                </a:extLst>
-              </a:tr>
-            </a:tbl>
-          </a:graphicData>
-        </a:graphic>
-      </p:graphicFrame>
     </p:spTree>
     <p:extLst>
       <p:ext uri="{BB962C8B-B14F-4D97-AF65-F5344CB8AC3E}">
-        <p14:creationId xmlns:p14="http://schemas.microsoft.com/office/powerpoint/2010/main" val="1743066079"/>
+        <p14:creationId xmlns:p14="http://schemas.microsoft.com/office/powerpoint/2010/main" val="1004413877"/>
       </p:ext>
     </p:extLst>
   </p:cSld>
@@ -5724,7 +5377,7 @@
                 <a:latin typeface="Times New Roman" panose="02020603050405020304" pitchFamily="18" charset="0"/>
                 <a:cs typeface="Times New Roman" panose="02020603050405020304" pitchFamily="18" charset="0"/>
               </a:rPr>
-              <a:t>Impact on Students </a:t>
+              <a:t>Advantages of AI </a:t>
             </a:r>
             <a:endParaRPr lang="en-US" sz="3000" b="0" strike="noStrike" spc="-1" dirty="0">
               <a:solidFill>
@@ -5839,7 +5492,7 @@
             </a:pPr>
             <a:r>
               <a:rPr lang="en-IN" sz="2000" dirty="0"/>
-              <a:t>Personalized learning </a:t>
+              <a:t>Personalization learning tailored to individual needs</a:t>
             </a:r>
           </a:p>
           <a:p>
@@ -5862,7 +5515,7 @@
             </a:pPr>
             <a:r>
               <a:rPr lang="en-US" sz="2000" dirty="0"/>
-              <a:t>Faster understanding </a:t>
+              <a:t>Increased efficiency in academic tasks </a:t>
             </a:r>
           </a:p>
           <a:p>
@@ -5891,7 +5544,7 @@
                 <a:ea typeface="Calibri" panose="020F0502020204030204" pitchFamily="34" charset="0"/>
                 <a:cs typeface="Times New Roman" panose="02020603050405020304" pitchFamily="18" charset="0"/>
               </a:rPr>
-              <a:t>Independent Learning </a:t>
+              <a:t>Improved accessibility for diverse learners </a:t>
             </a:r>
           </a:p>
           <a:p>
@@ -5926,7 +5579,42 @@
                 <a:ea typeface="Calibri" panose="020F0502020204030204" pitchFamily="34" charset="0"/>
                 <a:cs typeface="Times New Roman" panose="02020603050405020304" pitchFamily="18" charset="0"/>
               </a:rPr>
-              <a:t>Better engagement </a:t>
+              <a:t>Continuous support and instant feedbacks </a:t>
+            </a:r>
+          </a:p>
+          <a:p>
+            <a:pPr marL="457200" lvl="0" indent="-317500">
+              <a:buClr>
+                <a:srgbClr val="000000"/>
+              </a:buClr>
+              <a:buSzPts val="1400"/>
+              <a:buChar char="●"/>
+            </a:pPr>
+            <a:endParaRPr lang="en-US" sz="2000" dirty="0">
+              <a:solidFill>
+                <a:srgbClr val="000000"/>
+              </a:solidFill>
+              <a:ea typeface="Calibri" panose="020F0502020204030204" pitchFamily="34" charset="0"/>
+              <a:cs typeface="Times New Roman" panose="02020603050405020304" pitchFamily="18" charset="0"/>
+            </a:endParaRPr>
+          </a:p>
+          <a:p>
+            <a:pPr marL="457200" lvl="0" indent="-317500">
+              <a:buClr>
+                <a:srgbClr val="000000"/>
+              </a:buClr>
+              <a:buSzPts val="1400"/>
+              <a:buChar char="●"/>
+            </a:pPr>
+            <a:r>
+              <a:rPr lang="en-US" sz="2000" dirty="0">
+                <a:solidFill>
+                  <a:srgbClr val="000000"/>
+                </a:solidFill>
+                <a:ea typeface="Calibri" panose="020F0502020204030204" pitchFamily="34" charset="0"/>
+                <a:cs typeface="Times New Roman" panose="02020603050405020304" pitchFamily="18" charset="0"/>
+              </a:rPr>
+              <a:t>Scalability (can support large number of students)</a:t>
             </a:r>
             <a:endParaRPr lang="en-US" sz="3600" dirty="0">
               <a:ea typeface="Calibri" panose="020F0502020204030204" pitchFamily="34" charset="0"/>
@@ -6114,7 +5802,7 @@
     </p:spTree>
     <p:extLst>
       <p:ext uri="{BB962C8B-B14F-4D97-AF65-F5344CB8AC3E}">
-        <p14:creationId xmlns:p14="http://schemas.microsoft.com/office/powerpoint/2010/main" val="1145519295"/>
+        <p14:creationId xmlns:p14="http://schemas.microsoft.com/office/powerpoint/2010/main" val="4175474165"/>
       </p:ext>
     </p:extLst>
   </p:cSld>
@@ -6176,7 +5864,7 @@
                 <a:latin typeface="Times New Roman" panose="02020603050405020304" pitchFamily="18" charset="0"/>
                 <a:cs typeface="Times New Roman" panose="02020603050405020304" pitchFamily="18" charset="0"/>
               </a:rPr>
-              <a:t>Impact on Teachers  </a:t>
+              <a:t>Challenges</a:t>
             </a:r>
             <a:endParaRPr lang="en-US" sz="3000" b="0" strike="noStrike" spc="-1" dirty="0">
               <a:solidFill>
@@ -6291,7 +5979,7 @@
             </a:pPr>
             <a:r>
               <a:rPr lang="en-IN" sz="2000" dirty="0"/>
-              <a:t>Reduced workload </a:t>
+              <a:t>Data privacy and security concerns</a:t>
             </a:r>
           </a:p>
           <a:p>
@@ -6314,7 +6002,7 @@
             </a:pPr>
             <a:r>
               <a:rPr lang="en-US" sz="2000" dirty="0"/>
-              <a:t>Automated grading </a:t>
+              <a:t>Algorithm bias and fairness issues </a:t>
             </a:r>
           </a:p>
           <a:p>
@@ -6343,7 +6031,7 @@
                 <a:ea typeface="Calibri" panose="020F0502020204030204" pitchFamily="34" charset="0"/>
                 <a:cs typeface="Times New Roman" panose="02020603050405020304" pitchFamily="18" charset="0"/>
               </a:rPr>
-              <a:t>Better student insights </a:t>
+              <a:t>Digital divide and accessibility limitations </a:t>
             </a:r>
           </a:p>
           <a:p>
@@ -6371,8 +6059,48 @@
               <a:buChar char="●"/>
             </a:pPr>
             <a:r>
-              <a:rPr lang="en-US" sz="2000" dirty="0"/>
-              <a:t>More focus on interactive teaching and mentoring</a:t>
+              <a:rPr lang="en-US" sz="2000" dirty="0">
+                <a:solidFill>
+                  <a:srgbClr val="000000"/>
+                </a:solidFill>
+                <a:ea typeface="Calibri" panose="020F0502020204030204" pitchFamily="34" charset="0"/>
+                <a:cs typeface="Times New Roman" panose="02020603050405020304" pitchFamily="18" charset="0"/>
+              </a:rPr>
+              <a:t>Risk of over-reliance of AI tools </a:t>
+            </a:r>
+          </a:p>
+          <a:p>
+            <a:pPr marL="457200" lvl="0" indent="-317500">
+              <a:buClr>
+                <a:srgbClr val="000000"/>
+              </a:buClr>
+              <a:buSzPts val="1400"/>
+              <a:buChar char="●"/>
+            </a:pPr>
+            <a:endParaRPr lang="en-US" sz="2000" dirty="0">
+              <a:solidFill>
+                <a:srgbClr val="000000"/>
+              </a:solidFill>
+              <a:ea typeface="Calibri" panose="020F0502020204030204" pitchFamily="34" charset="0"/>
+              <a:cs typeface="Times New Roman" panose="02020603050405020304" pitchFamily="18" charset="0"/>
+            </a:endParaRPr>
+          </a:p>
+          <a:p>
+            <a:pPr marL="139700" lvl="0">
+              <a:buClr>
+                <a:srgbClr val="000000"/>
+              </a:buClr>
+              <a:buSzPts val="1400"/>
+            </a:pPr>
+            <a:r>
+              <a:rPr lang="en-US" sz="2000" dirty="0">
+                <a:solidFill>
+                  <a:srgbClr val="000000"/>
+                </a:solidFill>
+                <a:ea typeface="Calibri" panose="020F0502020204030204" pitchFamily="34" charset="0"/>
+                <a:cs typeface="Times New Roman" panose="02020603050405020304" pitchFamily="18" charset="0"/>
+              </a:rPr>
+              <a:t>These challenges must be addressed for responsible implementation.</a:t>
             </a:r>
             <a:endParaRPr lang="en-US" sz="3600" dirty="0">
               <a:ea typeface="Calibri" panose="020F0502020204030204" pitchFamily="34" charset="0"/>
@@ -6388,7 +6116,7 @@
                 <a:spcPts val="400"/>
               </a:spcBef>
             </a:pPr>
-            <a:endParaRPr lang="en-US" sz="1900" strike="noStrike" spc="-1" dirty="0">
+            <a:endParaRPr lang="en-US" sz="1900" b="0" strike="noStrike" spc="-1" dirty="0">
               <a:solidFill>
                 <a:srgbClr val="000000"/>
               </a:solidFill>
@@ -6560,7 +6288,7 @@
     </p:spTree>
     <p:extLst>
       <p:ext uri="{BB962C8B-B14F-4D97-AF65-F5344CB8AC3E}">
-        <p14:creationId xmlns:p14="http://schemas.microsoft.com/office/powerpoint/2010/main" val="1071535245"/>
+        <p14:creationId xmlns:p14="http://schemas.microsoft.com/office/powerpoint/2010/main" val="2011838803"/>
       </p:ext>
     </p:extLst>
   </p:cSld>
@@ -6622,7 +6350,7 @@
                 <a:latin typeface="Times New Roman" panose="02020603050405020304" pitchFamily="18" charset="0"/>
                 <a:cs typeface="Times New Roman" panose="02020603050405020304" pitchFamily="18" charset="0"/>
               </a:rPr>
-              <a:t>Impact on Institutions  </a:t>
+              <a:t>Overall Impact of AI in education </a:t>
             </a:r>
             <a:endParaRPr lang="en-US" sz="3000" b="0" strike="noStrike" spc="-1" dirty="0">
               <a:solidFill>
@@ -6737,7 +6465,7 @@
             </a:pPr>
             <a:r>
               <a:rPr lang="en-IN" sz="2000" dirty="0"/>
-              <a:t>Data-driven decisions </a:t>
+              <a:t>AI improves overall learning efficiency </a:t>
             </a:r>
           </a:p>
           <a:p>
@@ -6760,7 +6488,7 @@
             </a:pPr>
             <a:r>
               <a:rPr lang="en-US" sz="2000" dirty="0"/>
-              <a:t>Improved curriculum design  </a:t>
+              <a:t>Enhances engagement and performance </a:t>
             </a:r>
           </a:p>
           <a:p>
@@ -6789,7 +6517,7 @@
                 <a:ea typeface="Calibri" panose="020F0502020204030204" pitchFamily="34" charset="0"/>
                 <a:cs typeface="Times New Roman" panose="02020603050405020304" pitchFamily="18" charset="0"/>
               </a:rPr>
-              <a:t>Identify weak students early </a:t>
+              <a:t>Best results with AI + human interaction </a:t>
             </a:r>
           </a:p>
           <a:p>
@@ -6824,8 +6552,49 @@
                 <a:ea typeface="Calibri" panose="020F0502020204030204" pitchFamily="34" charset="0"/>
                 <a:cs typeface="Times New Roman" panose="02020603050405020304" pitchFamily="18" charset="0"/>
               </a:rPr>
-              <a:t>Scalable education </a:t>
-            </a:r>
+              <a:t>Requires responsible and balanced use </a:t>
+            </a:r>
+          </a:p>
+          <a:p>
+            <a:pPr marL="457200" lvl="0" indent="-317500">
+              <a:buClr>
+                <a:srgbClr val="000000"/>
+              </a:buClr>
+              <a:buSzPts val="1400"/>
+              <a:buChar char="●"/>
+            </a:pPr>
+            <a:endParaRPr lang="en-US" sz="2000" dirty="0">
+              <a:solidFill>
+                <a:srgbClr val="000000"/>
+              </a:solidFill>
+              <a:ea typeface="Calibri" panose="020F0502020204030204" pitchFamily="34" charset="0"/>
+              <a:cs typeface="Times New Roman" panose="02020603050405020304" pitchFamily="18" charset="0"/>
+            </a:endParaRPr>
+          </a:p>
+          <a:p>
+            <a:pPr marL="457200" lvl="0" indent="-317500">
+              <a:buClr>
+                <a:srgbClr val="000000"/>
+              </a:buClr>
+              <a:buSzPts val="1400"/>
+              <a:buChar char="●"/>
+            </a:pPr>
+            <a:endParaRPr lang="en-US" sz="2000" dirty="0">
+              <a:solidFill>
+                <a:srgbClr val="000000"/>
+              </a:solidFill>
+              <a:ea typeface="Calibri" panose="020F0502020204030204" pitchFamily="34" charset="0"/>
+              <a:cs typeface="Times New Roman" panose="02020603050405020304" pitchFamily="18" charset="0"/>
+            </a:endParaRPr>
+          </a:p>
+          <a:p>
+            <a:pPr marL="457200" lvl="0" indent="-317500">
+              <a:buClr>
+                <a:srgbClr val="000000"/>
+              </a:buClr>
+              <a:buSzPts val="1400"/>
+              <a:buChar char="●"/>
+            </a:pPr>
             <a:endParaRPr lang="en-US" sz="3600" dirty="0">
               <a:ea typeface="Calibri" panose="020F0502020204030204" pitchFamily="34" charset="0"/>
               <a:cs typeface="Times New Roman" panose="02020603050405020304" pitchFamily="18" charset="0"/>
@@ -7009,10 +6778,51 @@
           </a:p>
         </p:txBody>
       </p:sp>
+      <p:pic>
+        <p:nvPicPr>
+          <p:cNvPr id="2" name="Picture 1">
+            <a:extLst>
+              <a:ext uri="{FF2B5EF4-FFF2-40B4-BE49-F238E27FC236}">
+                <a16:creationId xmlns:a16="http://schemas.microsoft.com/office/drawing/2014/main" id="{1CEBE7FB-74E5-F90D-A474-C6A76FFA11DE}"/>
+              </a:ext>
+            </a:extLst>
+          </p:cNvPr>
+          <p:cNvPicPr>
+            <a:picLocks noChangeAspect="1"/>
+          </p:cNvPicPr>
+          <p:nvPr/>
+        </p:nvPicPr>
+        <p:blipFill>
+          <a:blip r:embed="rId2">
+            <a:extLst>
+              <a:ext uri="{28A0092B-C50C-407E-A947-70E740481C1C}">
+                <a14:useLocalDpi xmlns:a14="http://schemas.microsoft.com/office/drawing/2010/main" val="0"/>
+              </a:ext>
+            </a:extLst>
+          </a:blip>
+          <a:srcRect/>
+          <a:stretch>
+            <a:fillRect/>
+          </a:stretch>
+        </p:blipFill>
+        <p:spPr bwMode="auto">
+          <a:xfrm>
+            <a:off x="5179922" y="2974848"/>
+            <a:ext cx="3964077" cy="2973465"/>
+          </a:xfrm>
+          <a:prstGeom prst="rect">
+            <a:avLst/>
+          </a:prstGeom>
+          <a:noFill/>
+          <a:ln>
+            <a:noFill/>
+          </a:ln>
+        </p:spPr>
+      </p:pic>
     </p:spTree>
     <p:extLst>
       <p:ext uri="{BB962C8B-B14F-4D97-AF65-F5344CB8AC3E}">
-        <p14:creationId xmlns:p14="http://schemas.microsoft.com/office/powerpoint/2010/main" val="1004413877"/>
+        <p14:creationId xmlns:p14="http://schemas.microsoft.com/office/powerpoint/2010/main" val="1050066442"/>
       </p:ext>
     </p:extLst>
   </p:cSld>
@@ -7074,7 +6884,7 @@
                 <a:latin typeface="Times New Roman" panose="02020603050405020304" pitchFamily="18" charset="0"/>
                 <a:cs typeface="Times New Roman" panose="02020603050405020304" pitchFamily="18" charset="0"/>
               </a:rPr>
-              <a:t>Advantages of AI </a:t>
+              <a:t>Conclusion </a:t>
             </a:r>
             <a:endParaRPr lang="en-US" sz="3000" b="0" strike="noStrike" spc="-1" dirty="0">
               <a:solidFill>
@@ -7189,7 +6999,7 @@
             </a:pPr>
             <a:r>
               <a:rPr lang="en-IN" sz="2000" dirty="0"/>
-              <a:t>Personalization </a:t>
+              <a:t>AI significantly enhances learning outcomes, teaching efficiency, and institutional performance.</a:t>
             </a:r>
           </a:p>
           <a:p>
@@ -7212,7 +7022,7 @@
             </a:pPr>
             <a:r>
               <a:rPr lang="en-US" sz="2000" dirty="0"/>
-              <a:t>Efficiency </a:t>
+              <a:t>It enables personalized, efficient, and scalable education system.</a:t>
             </a:r>
           </a:p>
           <a:p>
@@ -7241,7 +7051,7 @@
                 <a:ea typeface="Calibri" panose="020F0502020204030204" pitchFamily="34" charset="0"/>
                 <a:cs typeface="Times New Roman" panose="02020603050405020304" pitchFamily="18" charset="0"/>
               </a:rPr>
-              <a:t>Accessibility </a:t>
+              <a:t>However, responsible usage and ethical consideration are crucial. </a:t>
             </a:r>
           </a:p>
           <a:p>
@@ -7261,12 +7071,11 @@
             </a:endParaRPr>
           </a:p>
           <a:p>
-            <a:pPr marL="457200" lvl="0" indent="-317500">
-              <a:buClr>
-                <a:srgbClr val="000000"/>
-              </a:buClr>
-              <a:buSzPts val="1400"/>
-              <a:buChar char="●"/>
+            <a:pPr marL="139700">
+              <a:buClr>
+                <a:srgbClr val="000000"/>
+              </a:buClr>
+              <a:buSzPts val="1400"/>
             </a:pPr>
             <a:r>
               <a:rPr lang="en-US" sz="2000" dirty="0">
@@ -7276,7 +7085,7 @@
                 <a:ea typeface="Calibri" panose="020F0502020204030204" pitchFamily="34" charset="0"/>
                 <a:cs typeface="Times New Roman" panose="02020603050405020304" pitchFamily="18" charset="0"/>
               </a:rPr>
-              <a:t>Continuous learning support </a:t>
+              <a:t>-   The future of education lies in a hybrid model of AI + human intelligence.</a:t>
             </a:r>
           </a:p>
           <a:p>
@@ -7303,16 +7112,21 @@
               <a:buSzPts val="1400"/>
               <a:buChar char="●"/>
             </a:pPr>
-            <a:r>
-              <a:rPr lang="en-US" sz="2000" dirty="0">
-                <a:solidFill>
-                  <a:srgbClr val="000000"/>
-                </a:solidFill>
-                <a:ea typeface="Calibri" panose="020F0502020204030204" pitchFamily="34" charset="0"/>
-                <a:cs typeface="Times New Roman" panose="02020603050405020304" pitchFamily="18" charset="0"/>
-              </a:rPr>
-              <a:t>Scalability (can support large number of students)</a:t>
-            </a:r>
+            <a:endParaRPr lang="en-US" sz="2000" dirty="0">
+              <a:solidFill>
+                <a:srgbClr val="000000"/>
+              </a:solidFill>
+              <a:ea typeface="Calibri" panose="020F0502020204030204" pitchFamily="34" charset="0"/>
+              <a:cs typeface="Times New Roman" panose="02020603050405020304" pitchFamily="18" charset="0"/>
+            </a:endParaRPr>
+          </a:p>
+          <a:p>
+            <a:pPr marL="139700" lvl="0">
+              <a:buClr>
+                <a:srgbClr val="000000"/>
+              </a:buClr>
+              <a:buSzPts val="1400"/>
+            </a:pPr>
             <a:endParaRPr lang="en-US" sz="3600" dirty="0">
               <a:ea typeface="Calibri" panose="020F0502020204030204" pitchFamily="34" charset="0"/>
               <a:cs typeface="Times New Roman" panose="02020603050405020304" pitchFamily="18" charset="0"/>
@@ -7499,7 +7313,7 @@
     </p:spTree>
     <p:extLst>
       <p:ext uri="{BB962C8B-B14F-4D97-AF65-F5344CB8AC3E}">
-        <p14:creationId xmlns:p14="http://schemas.microsoft.com/office/powerpoint/2010/main" val="4175474165"/>
+        <p14:creationId xmlns:p14="http://schemas.microsoft.com/office/powerpoint/2010/main" val="634711467"/>
       </p:ext>
     </p:extLst>
   </p:cSld>
@@ -7561,7 +7375,7 @@
                 <a:latin typeface="Times New Roman" panose="02020603050405020304" pitchFamily="18" charset="0"/>
                 <a:cs typeface="Times New Roman" panose="02020603050405020304" pitchFamily="18" charset="0"/>
               </a:rPr>
-              <a:t>Challenges</a:t>
+              <a:t>Future Scope </a:t>
             </a:r>
             <a:endParaRPr lang="en-US" sz="3000" b="0" strike="noStrike" spc="-1" dirty="0">
               <a:solidFill>
@@ -7676,7 +7490,7 @@
             </a:pPr>
             <a:r>
               <a:rPr lang="en-IN" sz="2000" dirty="0"/>
-              <a:t>Data privacy issues</a:t>
+              <a:t>Explore advance AI tools like Gemini and Copilot </a:t>
             </a:r>
           </a:p>
           <a:p>
@@ -7699,7 +7513,7 @@
             </a:pPr>
             <a:r>
               <a:rPr lang="en-US" sz="2000" dirty="0"/>
-              <a:t>Algorithm bias </a:t>
+              <a:t>Conduct long term studies on learning outcomes</a:t>
             </a:r>
           </a:p>
           <a:p>
@@ -7728,7 +7542,7 @@
                 <a:ea typeface="Calibri" panose="020F0502020204030204" pitchFamily="34" charset="0"/>
                 <a:cs typeface="Times New Roman" panose="02020603050405020304" pitchFamily="18" charset="0"/>
               </a:rPr>
-              <a:t>Digital divide </a:t>
+              <a:t>Integrate AI with technologies like VR and AR </a:t>
             </a:r>
           </a:p>
           <a:p>
@@ -7763,7 +7577,7 @@
                 <a:ea typeface="Calibri" panose="020F0502020204030204" pitchFamily="34" charset="0"/>
                 <a:cs typeface="Times New Roman" panose="02020603050405020304" pitchFamily="18" charset="0"/>
               </a:rPr>
-              <a:t>Over-reliance on AI </a:t>
+              <a:t>Improve ethical frameworks and data security</a:t>
             </a:r>
             <a:endParaRPr lang="en-US" sz="3600" dirty="0">
               <a:ea typeface="Calibri" panose="020F0502020204030204" pitchFamily="34" charset="0"/>
@@ -7951,7 +7765,7 @@
     </p:spTree>
     <p:extLst>
       <p:ext uri="{BB962C8B-B14F-4D97-AF65-F5344CB8AC3E}">
-        <p14:creationId xmlns:p14="http://schemas.microsoft.com/office/powerpoint/2010/main" val="2011838803"/>
+        <p14:creationId xmlns:p14="http://schemas.microsoft.com/office/powerpoint/2010/main" val="204732330"/>
       </p:ext>
     </p:extLst>
   </p:cSld>
@@ -7986,8 +7800,8 @@
         </p:nvSpPr>
         <p:spPr>
           <a:xfrm>
-            <a:off x="457200" y="0"/>
-            <a:ext cx="6019560" cy="837720"/>
+            <a:off x="1297577" y="2821578"/>
+            <a:ext cx="6705599" cy="1410788"/>
           </a:xfrm>
           <a:prstGeom prst="rect">
             <a:avLst/>
@@ -8009,13 +7823,13 @@
               </a:lnSpc>
             </a:pPr>
             <a:r>
-              <a:rPr lang="en" sz="3200" dirty="0">
+              <a:rPr lang="en" sz="5400" dirty="0">
                 <a:latin typeface="Times New Roman" panose="02020603050405020304" pitchFamily="18" charset="0"/>
                 <a:cs typeface="Times New Roman" panose="02020603050405020304" pitchFamily="18" charset="0"/>
               </a:rPr>
-              <a:t>Discussion </a:t>
-            </a:r>
-            <a:endParaRPr lang="en-US" sz="3000" b="0" strike="noStrike" spc="-1" dirty="0">
+              <a:t>Thank You</a:t>
+            </a:r>
+            <a:endParaRPr lang="en-US" sz="5400" b="0" strike="noStrike" spc="-1" dirty="0">
               <a:solidFill>
                 <a:srgbClr val="000000"/>
               </a:solidFill>
@@ -8076,773 +7890,10 @@
           </a:p>
         </p:txBody>
       </p:sp>
-      <p:sp>
-        <p:nvSpPr>
-          <p:cNvPr id="5" name="TextShape 2"/>
-          <p:cNvSpPr txBox="1">
-            <a:spLocks noGrp="1" noRot="1" noMove="1" noResize="1" noEditPoints="1" noAdjustHandles="1" noChangeArrowheads="1" noChangeShapeType="1"/>
-          </p:cNvSpPr>
-          <p:nvPr/>
-        </p:nvSpPr>
-        <p:spPr>
-          <a:xfrm>
-            <a:off x="164008" y="1109742"/>
-            <a:ext cx="8838720" cy="4838571"/>
-          </a:xfrm>
-          <a:prstGeom prst="rect">
-            <a:avLst/>
-          </a:prstGeom>
-          <a:noFill/>
-          <a:ln w="9360">
-            <a:noFill/>
-          </a:ln>
-        </p:spPr>
-        <p:txBody>
-          <a:bodyPr>
-            <a:noAutofit/>
-          </a:bodyPr>
-          <a:lstStyle/>
-          <a:p>
-            <a:pPr>
-              <a:lnSpc>
-                <a:spcPct val="150000"/>
-              </a:lnSpc>
-              <a:spcBef>
-                <a:spcPts val="400"/>
-              </a:spcBef>
-            </a:pPr>
-            <a:endParaRPr lang="en-US" sz="1900" b="0" strike="noStrike" spc="-1" dirty="0">
-              <a:solidFill>
-                <a:srgbClr val="000000"/>
-              </a:solidFill>
-              <a:latin typeface="Calibri"/>
-            </a:endParaRPr>
-          </a:p>
-          <a:p>
-            <a:pPr marL="457200" lvl="0" indent="-317500">
-              <a:buClr>
-                <a:srgbClr val="000000"/>
-              </a:buClr>
-              <a:buSzPts val="1400"/>
-              <a:buChar char="●"/>
-            </a:pPr>
-            <a:r>
-              <a:rPr lang="en-IN" sz="2000" dirty="0"/>
-              <a:t>AI is a transformative tool, not just support </a:t>
-            </a:r>
-          </a:p>
-          <a:p>
-            <a:pPr marL="457200" lvl="0" indent="-317500">
-              <a:buClr>
-                <a:srgbClr val="000000"/>
-              </a:buClr>
-              <a:buSzPts val="1400"/>
-              <a:buChar char="●"/>
-            </a:pPr>
-            <a:endParaRPr lang="en-US" sz="2000" dirty="0"/>
-          </a:p>
-          <a:p>
-            <a:pPr marL="457200" lvl="0" indent="-317500">
-              <a:buClr>
-                <a:srgbClr val="000000"/>
-              </a:buClr>
-              <a:buSzPts val="1400"/>
-              <a:buChar char="●"/>
-            </a:pPr>
-            <a:r>
-              <a:rPr lang="en-US" sz="2000" dirty="0"/>
-              <a:t>Best results come from combining multiple AI tools </a:t>
-            </a:r>
-          </a:p>
-          <a:p>
-            <a:pPr marL="457200" lvl="0" indent="-317500">
-              <a:buClr>
-                <a:srgbClr val="000000"/>
-              </a:buClr>
-              <a:buSzPts val="1400"/>
-              <a:buChar char="●"/>
-            </a:pPr>
-            <a:endParaRPr lang="en-IN" sz="2000" dirty="0"/>
-          </a:p>
-          <a:p>
-            <a:pPr marL="457200" lvl="0" indent="-317500">
-              <a:buClr>
-                <a:srgbClr val="000000"/>
-              </a:buClr>
-              <a:buSzPts val="1400"/>
-              <a:buChar char="●"/>
-            </a:pPr>
-            <a:r>
-              <a:rPr lang="en-US" sz="2000" dirty="0">
-                <a:solidFill>
-                  <a:srgbClr val="000000"/>
-                </a:solidFill>
-                <a:ea typeface="Calibri" panose="020F0502020204030204" pitchFamily="34" charset="0"/>
-                <a:cs typeface="Times New Roman" panose="02020603050405020304" pitchFamily="18" charset="0"/>
-              </a:rPr>
-              <a:t>Balance between AI + human teaching is necessary </a:t>
-            </a:r>
-          </a:p>
-          <a:p>
-            <a:pPr marL="457200" lvl="0" indent="-317500">
-              <a:buClr>
-                <a:srgbClr val="000000"/>
-              </a:buClr>
-              <a:buSzPts val="1400"/>
-              <a:buChar char="●"/>
-            </a:pPr>
-            <a:endParaRPr lang="en-US" sz="2000" dirty="0">
-              <a:solidFill>
-                <a:srgbClr val="000000"/>
-              </a:solidFill>
-              <a:ea typeface="Calibri" panose="020F0502020204030204" pitchFamily="34" charset="0"/>
-              <a:cs typeface="Times New Roman" panose="02020603050405020304" pitchFamily="18" charset="0"/>
-            </a:endParaRPr>
-          </a:p>
-          <a:p>
-            <a:pPr marL="457200" lvl="0" indent="-317500">
-              <a:buClr>
-                <a:srgbClr val="000000"/>
-              </a:buClr>
-              <a:buSzPts val="1400"/>
-              <a:buChar char="●"/>
-            </a:pPr>
-            <a:endParaRPr lang="en-US" sz="3600" dirty="0">
-              <a:ea typeface="Calibri" panose="020F0502020204030204" pitchFamily="34" charset="0"/>
-              <a:cs typeface="Times New Roman" panose="02020603050405020304" pitchFamily="18" charset="0"/>
-            </a:endParaRPr>
-          </a:p>
-          <a:p>
-            <a:pPr>
-              <a:lnSpc>
-                <a:spcPct val="100000"/>
-              </a:lnSpc>
-              <a:spcBef>
-                <a:spcPts val="400"/>
-              </a:spcBef>
-            </a:pPr>
-            <a:endParaRPr lang="en-US" sz="1900" b="0" strike="noStrike" spc="-1" dirty="0">
-              <a:solidFill>
-                <a:srgbClr val="000000"/>
-              </a:solidFill>
-              <a:latin typeface="Calibri"/>
-            </a:endParaRPr>
-          </a:p>
-          <a:p>
-            <a:pPr>
-              <a:lnSpc>
-                <a:spcPct val="100000"/>
-              </a:lnSpc>
-              <a:spcBef>
-                <a:spcPts val="400"/>
-              </a:spcBef>
-            </a:pPr>
-            <a:endParaRPr lang="en-US" sz="1900" spc="-1" dirty="0">
-              <a:solidFill>
-                <a:srgbClr val="000000"/>
-              </a:solidFill>
-              <a:latin typeface="Calibri"/>
-            </a:endParaRPr>
-          </a:p>
-          <a:p>
-            <a:pPr>
-              <a:lnSpc>
-                <a:spcPct val="150000"/>
-              </a:lnSpc>
-              <a:spcBef>
-                <a:spcPts val="400"/>
-              </a:spcBef>
-            </a:pPr>
-            <a:endParaRPr lang="en-US" sz="1900" b="0" strike="noStrike" spc="-1" dirty="0">
-              <a:solidFill>
-                <a:srgbClr val="000000"/>
-              </a:solidFill>
-              <a:latin typeface="Calibri"/>
-            </a:endParaRPr>
-          </a:p>
-          <a:p>
-            <a:pPr>
-              <a:lnSpc>
-                <a:spcPct val="150000"/>
-              </a:lnSpc>
-              <a:spcBef>
-                <a:spcPts val="400"/>
-              </a:spcBef>
-            </a:pPr>
-            <a:endParaRPr lang="en-US" sz="1900" b="0" strike="noStrike" spc="-1" dirty="0">
-              <a:solidFill>
-                <a:srgbClr val="000000"/>
-              </a:solidFill>
-              <a:latin typeface="Calibri"/>
-            </a:endParaRPr>
-          </a:p>
-          <a:p>
-            <a:pPr>
-              <a:lnSpc>
-                <a:spcPct val="150000"/>
-              </a:lnSpc>
-              <a:spcBef>
-                <a:spcPts val="400"/>
-              </a:spcBef>
-            </a:pPr>
-            <a:endParaRPr lang="en-US" sz="1900" b="0" strike="noStrike" spc="-1" dirty="0">
-              <a:solidFill>
-                <a:srgbClr val="000000"/>
-              </a:solidFill>
-              <a:latin typeface="Calibri"/>
-            </a:endParaRPr>
-          </a:p>
-          <a:p>
-            <a:pPr>
-              <a:lnSpc>
-                <a:spcPct val="150000"/>
-              </a:lnSpc>
-              <a:spcBef>
-                <a:spcPts val="400"/>
-              </a:spcBef>
-            </a:pPr>
-            <a:endParaRPr lang="en-US" sz="1900" b="0" strike="noStrike" spc="-1" dirty="0">
-              <a:solidFill>
-                <a:srgbClr val="000000"/>
-              </a:solidFill>
-              <a:latin typeface="Calibri"/>
-            </a:endParaRPr>
-          </a:p>
-          <a:p>
-            <a:pPr>
-              <a:lnSpc>
-                <a:spcPct val="100000"/>
-              </a:lnSpc>
-              <a:spcBef>
-                <a:spcPts val="400"/>
-              </a:spcBef>
-            </a:pPr>
-            <a:endParaRPr lang="en-US" sz="1900" b="0" strike="noStrike" spc="-1" dirty="0">
-              <a:solidFill>
-                <a:srgbClr val="000000"/>
-              </a:solidFill>
-              <a:latin typeface="Calibri"/>
-            </a:endParaRPr>
-          </a:p>
-          <a:p>
-            <a:pPr>
-              <a:lnSpc>
-                <a:spcPct val="100000"/>
-              </a:lnSpc>
-              <a:spcBef>
-                <a:spcPts val="400"/>
-              </a:spcBef>
-            </a:pPr>
-            <a:endParaRPr lang="en-US" sz="1900" b="0" strike="noStrike" spc="-1" dirty="0">
-              <a:solidFill>
-                <a:srgbClr val="000000"/>
-              </a:solidFill>
-              <a:latin typeface="Calibri"/>
-            </a:endParaRPr>
-          </a:p>
-          <a:p>
-            <a:pPr>
-              <a:lnSpc>
-                <a:spcPct val="100000"/>
-              </a:lnSpc>
-              <a:spcBef>
-                <a:spcPts val="400"/>
-              </a:spcBef>
-            </a:pPr>
-            <a:endParaRPr lang="en-US" sz="1900" b="0" strike="noStrike" spc="-1" dirty="0">
-              <a:solidFill>
-                <a:srgbClr val="000000"/>
-              </a:solidFill>
-              <a:latin typeface="Calibri"/>
-            </a:endParaRPr>
-          </a:p>
-          <a:p>
-            <a:pPr>
-              <a:lnSpc>
-                <a:spcPct val="100000"/>
-              </a:lnSpc>
-              <a:spcBef>
-                <a:spcPts val="400"/>
-              </a:spcBef>
-            </a:pPr>
-            <a:endParaRPr lang="en-US" sz="1900" b="0" strike="noStrike" spc="-1" dirty="0">
-              <a:solidFill>
-                <a:srgbClr val="000000"/>
-              </a:solidFill>
-              <a:latin typeface="Calibri"/>
-            </a:endParaRPr>
-          </a:p>
-          <a:p>
-            <a:pPr>
-              <a:lnSpc>
-                <a:spcPct val="100000"/>
-              </a:lnSpc>
-              <a:spcBef>
-                <a:spcPts val="400"/>
-              </a:spcBef>
-            </a:pPr>
-            <a:endParaRPr lang="en-US" sz="1900" b="0" strike="noStrike" spc="-1" dirty="0">
-              <a:solidFill>
-                <a:srgbClr val="000000"/>
-              </a:solidFill>
-              <a:latin typeface="Calibri"/>
-            </a:endParaRPr>
-          </a:p>
-        </p:txBody>
-      </p:sp>
     </p:spTree>
     <p:extLst>
       <p:ext uri="{BB962C8B-B14F-4D97-AF65-F5344CB8AC3E}">
-        <p14:creationId xmlns:p14="http://schemas.microsoft.com/office/powerpoint/2010/main" val="1050066442"/>
-      </p:ext>
-    </p:extLst>
-  </p:cSld>
-  <p:clrMapOvr>
-    <a:masterClrMapping/>
-  </p:clrMapOvr>
-</p:sld>
-</file>
-
-<file path=ppt/slides/slide19.xml><?xml version="1.0" encoding="utf-8"?>
-<p:sld xmlns:a="http://schemas.openxmlformats.org/drawingml/2006/main" xmlns:r="http://schemas.openxmlformats.org/officeDocument/2006/relationships" xmlns:p="http://schemas.openxmlformats.org/presentationml/2006/main">
-  <p:cSld>
-    <p:spTree>
-      <p:nvGrpSpPr>
-        <p:cNvPr id="1" name=""/>
-        <p:cNvGrpSpPr/>
-        <p:nvPr/>
-      </p:nvGrpSpPr>
-      <p:grpSpPr>
-        <a:xfrm>
-          <a:off x="0" y="0"/>
-          <a:ext cx="0" cy="0"/>
-          <a:chOff x="0" y="0"/>
-          <a:chExt cx="0" cy="0"/>
-        </a:xfrm>
-      </p:grpSpPr>
-      <p:sp>
-        <p:nvSpPr>
-          <p:cNvPr id="108" name="TextShape 1"/>
-          <p:cNvSpPr txBox="1"/>
-          <p:nvPr/>
-        </p:nvSpPr>
-        <p:spPr>
-          <a:xfrm>
-            <a:off x="457200" y="0"/>
-            <a:ext cx="6019560" cy="837720"/>
-          </a:xfrm>
-          <a:prstGeom prst="rect">
-            <a:avLst/>
-          </a:prstGeom>
-          <a:noFill/>
-          <a:ln w="9360">
-            <a:noFill/>
-          </a:ln>
-        </p:spPr>
-        <p:txBody>
-          <a:bodyPr anchor="ctr">
-            <a:noAutofit/>
-          </a:bodyPr>
-          <a:lstStyle/>
-          <a:p>
-            <a:pPr algn="ctr">
-              <a:lnSpc>
-                <a:spcPct val="100000"/>
-              </a:lnSpc>
-            </a:pPr>
-            <a:r>
-              <a:rPr lang="en" sz="3200" dirty="0">
-                <a:latin typeface="Times New Roman" panose="02020603050405020304" pitchFamily="18" charset="0"/>
-                <a:cs typeface="Times New Roman" panose="02020603050405020304" pitchFamily="18" charset="0"/>
-              </a:rPr>
-              <a:t>Conclusion </a:t>
-            </a:r>
-            <a:endParaRPr lang="en-US" sz="3000" b="0" strike="noStrike" spc="-1" dirty="0">
-              <a:solidFill>
-                <a:srgbClr val="000000"/>
-              </a:solidFill>
-              <a:latin typeface="Times New Roman" panose="02020603050405020304" pitchFamily="18" charset="0"/>
-              <a:cs typeface="Times New Roman" panose="02020603050405020304" pitchFamily="18" charset="0"/>
-            </a:endParaRPr>
-          </a:p>
-        </p:txBody>
-      </p:sp>
-      <p:sp>
-        <p:nvSpPr>
-          <p:cNvPr id="110" name="TextShape 3"/>
-          <p:cNvSpPr txBox="1"/>
-          <p:nvPr/>
-        </p:nvSpPr>
-        <p:spPr>
-          <a:xfrm>
-            <a:off x="6553080" y="6356520"/>
-            <a:ext cx="2133360" cy="364680"/>
-          </a:xfrm>
-          <a:prstGeom prst="rect">
-            <a:avLst/>
-          </a:prstGeom>
-          <a:noFill/>
-          <a:ln>
-            <a:noFill/>
-          </a:ln>
-        </p:spPr>
-        <p:txBody>
-          <a:bodyPr anchor="ctr">
-            <a:noAutofit/>
-          </a:bodyPr>
-          <a:lstStyle/>
-          <a:p>
-            <a:pPr algn="r">
-              <a:lnSpc>
-                <a:spcPct val="100000"/>
-              </a:lnSpc>
-            </a:pPr>
-            <a:fld id="{4D4FEEEE-7AC5-48A9-86F4-13448BE87B58}" type="slidenum">
-              <a:rPr lang="en-US" sz="1200" b="1" strike="noStrike" spc="-1">
-                <a:solidFill>
-                  <a:srgbClr val="000000"/>
-                </a:solidFill>
-                <a:latin typeface="Calibri"/>
-                <a:ea typeface="MS PGothic"/>
-              </a:rPr>
-              <a:pPr algn="r">
-                <a:lnSpc>
-                  <a:spcPct val="100000"/>
-                </a:lnSpc>
-              </a:pPr>
-              <a:t>19</a:t>
-            </a:fld>
-            <a:endParaRPr lang="en-GB" sz="1200" b="0" strike="noStrike" spc="-1">
-              <a:latin typeface="Times New Roman"/>
-            </a:endParaRPr>
-          </a:p>
-        </p:txBody>
-      </p:sp>
-      <p:sp>
-        <p:nvSpPr>
-          <p:cNvPr id="5" name="TextShape 2"/>
-          <p:cNvSpPr txBox="1">
-            <a:spLocks noGrp="1" noRot="1" noMove="1" noResize="1" noEditPoints="1" noAdjustHandles="1" noChangeArrowheads="1" noChangeShapeType="1"/>
-          </p:cNvSpPr>
-          <p:nvPr/>
-        </p:nvSpPr>
-        <p:spPr>
-          <a:xfrm>
-            <a:off x="164008" y="1109742"/>
-            <a:ext cx="8838720" cy="4838571"/>
-          </a:xfrm>
-          <a:prstGeom prst="rect">
-            <a:avLst/>
-          </a:prstGeom>
-          <a:noFill/>
-          <a:ln w="9360">
-            <a:noFill/>
-          </a:ln>
-        </p:spPr>
-        <p:txBody>
-          <a:bodyPr>
-            <a:noAutofit/>
-          </a:bodyPr>
-          <a:lstStyle/>
-          <a:p>
-            <a:pPr>
-              <a:lnSpc>
-                <a:spcPct val="150000"/>
-              </a:lnSpc>
-              <a:spcBef>
-                <a:spcPts val="400"/>
-              </a:spcBef>
-            </a:pPr>
-            <a:endParaRPr lang="en-US" sz="1900" b="0" strike="noStrike" spc="-1" dirty="0">
-              <a:solidFill>
-                <a:srgbClr val="000000"/>
-              </a:solidFill>
-              <a:latin typeface="Calibri"/>
-            </a:endParaRPr>
-          </a:p>
-          <a:p>
-            <a:pPr marL="457200" lvl="0" indent="-317500">
-              <a:buClr>
-                <a:srgbClr val="000000"/>
-              </a:buClr>
-              <a:buSzPts val="1400"/>
-              <a:buChar char="●"/>
-            </a:pPr>
-            <a:r>
-              <a:rPr lang="en-IN" sz="2000" dirty="0"/>
-              <a:t>AI improves learning, teaching, and institutions </a:t>
-            </a:r>
-          </a:p>
-          <a:p>
-            <a:pPr marL="457200" lvl="0" indent="-317500">
-              <a:buClr>
-                <a:srgbClr val="000000"/>
-              </a:buClr>
-              <a:buSzPts val="1400"/>
-              <a:buChar char="●"/>
-            </a:pPr>
-            <a:endParaRPr lang="en-US" sz="2000" dirty="0"/>
-          </a:p>
-          <a:p>
-            <a:pPr marL="457200" lvl="0" indent="-317500">
-              <a:buClr>
-                <a:srgbClr val="000000"/>
-              </a:buClr>
-              <a:buSzPts val="1400"/>
-              <a:buChar char="●"/>
-            </a:pPr>
-            <a:r>
-              <a:rPr lang="en-US" sz="2000" dirty="0"/>
-              <a:t>Provides personalized and </a:t>
-            </a:r>
-            <a:r>
-              <a:rPr lang="en-IN" sz="2000" dirty="0"/>
-              <a:t>efficient</a:t>
-            </a:r>
-            <a:r>
-              <a:rPr lang="en-US" sz="2000" dirty="0"/>
-              <a:t> education </a:t>
-            </a:r>
-          </a:p>
-          <a:p>
-            <a:pPr marL="457200" lvl="0" indent="-317500">
-              <a:buClr>
-                <a:srgbClr val="000000"/>
-              </a:buClr>
-              <a:buSzPts val="1400"/>
-              <a:buChar char="●"/>
-            </a:pPr>
-            <a:endParaRPr lang="en-IN" sz="2000" dirty="0"/>
-          </a:p>
-          <a:p>
-            <a:pPr marL="457200" lvl="0" indent="-317500">
-              <a:buClr>
-                <a:srgbClr val="000000"/>
-              </a:buClr>
-              <a:buSzPts val="1400"/>
-              <a:buChar char="●"/>
-            </a:pPr>
-            <a:r>
-              <a:rPr lang="en-US" sz="2000" dirty="0">
-                <a:solidFill>
-                  <a:srgbClr val="000000"/>
-                </a:solidFill>
-                <a:ea typeface="Calibri" panose="020F0502020204030204" pitchFamily="34" charset="0"/>
-                <a:cs typeface="Times New Roman" panose="02020603050405020304" pitchFamily="18" charset="0"/>
-              </a:rPr>
-              <a:t>Must be used responsibly and ethically </a:t>
-            </a:r>
-          </a:p>
-          <a:p>
-            <a:pPr marL="457200" lvl="0" indent="-317500">
-              <a:buClr>
-                <a:srgbClr val="000000"/>
-              </a:buClr>
-              <a:buSzPts val="1400"/>
-              <a:buChar char="●"/>
-            </a:pPr>
-            <a:endParaRPr lang="en-US" sz="2000" dirty="0">
-              <a:solidFill>
-                <a:srgbClr val="000000"/>
-              </a:solidFill>
-              <a:ea typeface="Calibri" panose="020F0502020204030204" pitchFamily="34" charset="0"/>
-              <a:cs typeface="Times New Roman" panose="02020603050405020304" pitchFamily="18" charset="0"/>
-            </a:endParaRPr>
-          </a:p>
-          <a:p>
-            <a:pPr marL="139700" lvl="0">
-              <a:buClr>
-                <a:srgbClr val="000000"/>
-              </a:buClr>
-              <a:buSzPts val="1400"/>
-            </a:pPr>
-            <a:endParaRPr lang="en-US" sz="3600" dirty="0">
-              <a:ea typeface="Calibri" panose="020F0502020204030204" pitchFamily="34" charset="0"/>
-              <a:cs typeface="Times New Roman" panose="02020603050405020304" pitchFamily="18" charset="0"/>
-            </a:endParaRPr>
-          </a:p>
-          <a:p>
-            <a:pPr>
-              <a:lnSpc>
-                <a:spcPct val="100000"/>
-              </a:lnSpc>
-              <a:spcBef>
-                <a:spcPts val="400"/>
-              </a:spcBef>
-            </a:pPr>
-            <a:endParaRPr lang="en-US" sz="1900" b="0" strike="noStrike" spc="-1" dirty="0">
-              <a:solidFill>
-                <a:srgbClr val="000000"/>
-              </a:solidFill>
-              <a:latin typeface="Calibri"/>
-            </a:endParaRPr>
-          </a:p>
-          <a:p>
-            <a:pPr>
-              <a:lnSpc>
-                <a:spcPct val="100000"/>
-              </a:lnSpc>
-              <a:spcBef>
-                <a:spcPts val="400"/>
-              </a:spcBef>
-            </a:pPr>
-            <a:endParaRPr lang="en-US" sz="1900" spc="-1" dirty="0">
-              <a:solidFill>
-                <a:srgbClr val="000000"/>
-              </a:solidFill>
-              <a:latin typeface="Calibri"/>
-            </a:endParaRPr>
-          </a:p>
-          <a:p>
-            <a:pPr>
-              <a:lnSpc>
-                <a:spcPct val="150000"/>
-              </a:lnSpc>
-              <a:spcBef>
-                <a:spcPts val="400"/>
-              </a:spcBef>
-            </a:pPr>
-            <a:endParaRPr lang="en-US" sz="1900" b="0" strike="noStrike" spc="-1" dirty="0">
-              <a:solidFill>
-                <a:srgbClr val="000000"/>
-              </a:solidFill>
-              <a:latin typeface="Calibri"/>
-            </a:endParaRPr>
-          </a:p>
-          <a:p>
-            <a:pPr>
-              <a:lnSpc>
-                <a:spcPct val="150000"/>
-              </a:lnSpc>
-              <a:spcBef>
-                <a:spcPts val="400"/>
-              </a:spcBef>
-            </a:pPr>
-            <a:endParaRPr lang="en-US" sz="1900" b="0" strike="noStrike" spc="-1" dirty="0">
-              <a:solidFill>
-                <a:srgbClr val="000000"/>
-              </a:solidFill>
-              <a:latin typeface="Calibri"/>
-            </a:endParaRPr>
-          </a:p>
-          <a:p>
-            <a:pPr>
-              <a:lnSpc>
-                <a:spcPct val="150000"/>
-              </a:lnSpc>
-              <a:spcBef>
-                <a:spcPts val="400"/>
-              </a:spcBef>
-            </a:pPr>
-            <a:endParaRPr lang="en-US" sz="1900" b="0" strike="noStrike" spc="-1" dirty="0">
-              <a:solidFill>
-                <a:srgbClr val="000000"/>
-              </a:solidFill>
-              <a:latin typeface="Calibri"/>
-            </a:endParaRPr>
-          </a:p>
-          <a:p>
-            <a:pPr>
-              <a:lnSpc>
-                <a:spcPct val="150000"/>
-              </a:lnSpc>
-              <a:spcBef>
-                <a:spcPts val="400"/>
-              </a:spcBef>
-            </a:pPr>
-            <a:endParaRPr lang="en-US" sz="1900" b="0" strike="noStrike" spc="-1" dirty="0">
-              <a:solidFill>
-                <a:srgbClr val="000000"/>
-              </a:solidFill>
-              <a:latin typeface="Calibri"/>
-            </a:endParaRPr>
-          </a:p>
-          <a:p>
-            <a:pPr>
-              <a:lnSpc>
-                <a:spcPct val="100000"/>
-              </a:lnSpc>
-              <a:spcBef>
-                <a:spcPts val="400"/>
-              </a:spcBef>
-            </a:pPr>
-            <a:endParaRPr lang="en-US" sz="1900" b="0" strike="noStrike" spc="-1" dirty="0">
-              <a:solidFill>
-                <a:srgbClr val="000000"/>
-              </a:solidFill>
-              <a:latin typeface="Calibri"/>
-            </a:endParaRPr>
-          </a:p>
-          <a:p>
-            <a:pPr>
-              <a:lnSpc>
-                <a:spcPct val="100000"/>
-              </a:lnSpc>
-              <a:spcBef>
-                <a:spcPts val="400"/>
-              </a:spcBef>
-            </a:pPr>
-            <a:endParaRPr lang="en-US" sz="1900" b="0" strike="noStrike" spc="-1" dirty="0">
-              <a:solidFill>
-                <a:srgbClr val="000000"/>
-              </a:solidFill>
-              <a:latin typeface="Calibri"/>
-            </a:endParaRPr>
-          </a:p>
-          <a:p>
-            <a:pPr>
-              <a:lnSpc>
-                <a:spcPct val="100000"/>
-              </a:lnSpc>
-              <a:spcBef>
-                <a:spcPts val="400"/>
-              </a:spcBef>
-            </a:pPr>
-            <a:endParaRPr lang="en-US" sz="1900" b="0" strike="noStrike" spc="-1" dirty="0">
-              <a:solidFill>
-                <a:srgbClr val="000000"/>
-              </a:solidFill>
-              <a:latin typeface="Calibri"/>
-            </a:endParaRPr>
-          </a:p>
-          <a:p>
-            <a:pPr>
-              <a:lnSpc>
-                <a:spcPct val="100000"/>
-              </a:lnSpc>
-              <a:spcBef>
-                <a:spcPts val="400"/>
-              </a:spcBef>
-            </a:pPr>
-            <a:endParaRPr lang="en-US" sz="1900" b="0" strike="noStrike" spc="-1" dirty="0">
-              <a:solidFill>
-                <a:srgbClr val="000000"/>
-              </a:solidFill>
-              <a:latin typeface="Calibri"/>
-            </a:endParaRPr>
-          </a:p>
-          <a:p>
-            <a:pPr>
-              <a:lnSpc>
-                <a:spcPct val="100000"/>
-              </a:lnSpc>
-              <a:spcBef>
-                <a:spcPts val="400"/>
-              </a:spcBef>
-            </a:pPr>
-            <a:endParaRPr lang="en-US" sz="1900" b="0" strike="noStrike" spc="-1" dirty="0">
-              <a:solidFill>
-                <a:srgbClr val="000000"/>
-              </a:solidFill>
-              <a:latin typeface="Calibri"/>
-            </a:endParaRPr>
-          </a:p>
-        </p:txBody>
-      </p:sp>
-    </p:spTree>
-    <p:extLst>
-      <p:ext uri="{BB962C8B-B14F-4D97-AF65-F5344CB8AC3E}">
-        <p14:creationId xmlns:p14="http://schemas.microsoft.com/office/powerpoint/2010/main" val="634711467"/>
+        <p14:creationId xmlns:p14="http://schemas.microsoft.com/office/powerpoint/2010/main" val="2834479809"/>
       </p:ext>
     </p:extLst>
   </p:cSld>
@@ -9010,6 +8061,39 @@
             </a:endParaRPr>
           </a:p>
           <a:p>
+            <a:pPr marL="139700" lvl="0">
+              <a:buClr>
+                <a:srgbClr val="000000"/>
+              </a:buClr>
+              <a:buSzPts val="1400"/>
+            </a:pPr>
+            <a:r>
+              <a:rPr lang="en-IN" sz="2000" dirty="0"/>
+              <a:t>Artificial Intelligence (AI) is rapidly transforming modern education by introducing intelligence that can adapt to individual learning needs.</a:t>
+            </a:r>
+          </a:p>
+          <a:p>
+            <a:pPr marL="139700" lvl="0">
+              <a:buClr>
+                <a:srgbClr val="000000"/>
+              </a:buClr>
+              <a:buSzPts val="1400"/>
+            </a:pPr>
+            <a:endParaRPr lang="en-IN" sz="2000" dirty="0"/>
+          </a:p>
+          <a:p>
+            <a:pPr marL="139700" lvl="0">
+              <a:buClr>
+                <a:srgbClr val="000000"/>
+              </a:buClr>
+              <a:buSzPts val="1400"/>
+            </a:pPr>
+            <a:r>
+              <a:rPr lang="en-US" sz="2000" dirty="0"/>
+              <a:t>Traditional education follows a “one-size-fits-all” method, which often fails to address differences in student learning speed and understanding.</a:t>
+            </a:r>
+          </a:p>
+          <a:p>
             <a:pPr marL="457200" lvl="0" indent="-317500">
               <a:buClr>
                 <a:srgbClr val="000000"/>
@@ -9017,51 +8101,14 @@
               <a:buSzPts val="1400"/>
               <a:buChar char="●"/>
             </a:pPr>
-            <a:r>
-              <a:rPr lang="en-IN" sz="2000" dirty="0"/>
-              <a:t>Artificial Intelligence is transforming modern education</a:t>
-            </a:r>
-          </a:p>
-          <a:p>
-            <a:pPr marL="457200" lvl="0" indent="-317500">
-              <a:buClr>
-                <a:srgbClr val="000000"/>
-              </a:buClr>
-              <a:buSzPts val="1400"/>
-              <a:buChar char="●"/>
-            </a:pPr>
-            <a:endParaRPr lang="en-US" sz="2000" dirty="0"/>
-          </a:p>
-          <a:p>
-            <a:pPr marL="457200" lvl="0" indent="-317500">
-              <a:buClr>
-                <a:srgbClr val="000000"/>
-              </a:buClr>
-              <a:buSzPts val="1400"/>
-              <a:buChar char="●"/>
-            </a:pPr>
-            <a:r>
-              <a:rPr lang="en-US" sz="2000" dirty="0"/>
-              <a:t>Traditional learning = same for all students</a:t>
-            </a:r>
-          </a:p>
-          <a:p>
-            <a:pPr marL="457200" lvl="0" indent="-317500">
-              <a:buClr>
-                <a:srgbClr val="000000"/>
-              </a:buClr>
-              <a:buSzPts val="1400"/>
-              <a:buChar char="●"/>
-            </a:pPr>
             <a:endParaRPr lang="en-IN" sz="2000" dirty="0"/>
           </a:p>
           <a:p>
-            <a:pPr marL="457200" lvl="0" indent="-317500">
-              <a:buClr>
-                <a:srgbClr val="000000"/>
-              </a:buClr>
-              <a:buSzPts val="1400"/>
-              <a:buChar char="●"/>
+            <a:pPr marL="139700" lvl="0">
+              <a:buClr>
+                <a:srgbClr val="000000"/>
+              </a:buClr>
+              <a:buSzPts val="1400"/>
             </a:pPr>
             <a:r>
               <a:rPr lang="en-US" sz="2000" dirty="0">
@@ -9071,16 +8118,15 @@
                 <a:ea typeface="Calibri" panose="020F0502020204030204" pitchFamily="34" charset="0"/>
                 <a:cs typeface="Times New Roman" panose="02020603050405020304" pitchFamily="18" charset="0"/>
               </a:rPr>
-              <a:t>AI enables personalized and adaptive learning </a:t>
-            </a:r>
-          </a:p>
-          <a:p>
-            <a:pPr marL="457200" lvl="0" indent="-317500">
-              <a:buClr>
-                <a:srgbClr val="000000"/>
-              </a:buClr>
-              <a:buSzPts val="1400"/>
-              <a:buChar char="●"/>
+              <a:t>AI enables personalized, adaptive, data-driven learning, allowing students to learn at their own pace.</a:t>
+            </a:r>
+          </a:p>
+          <a:p>
+            <a:pPr marL="139700" lvl="0">
+              <a:buClr>
+                <a:srgbClr val="000000"/>
+              </a:buClr>
+              <a:buSzPts val="1400"/>
             </a:pPr>
             <a:endParaRPr lang="en-US" sz="2000" dirty="0">
               <a:solidFill>
@@ -9091,12 +8137,11 @@
             </a:endParaRPr>
           </a:p>
           <a:p>
-            <a:pPr marL="457200" lvl="0" indent="-317500">
-              <a:buClr>
-                <a:srgbClr val="000000"/>
-              </a:buClr>
-              <a:buSzPts val="1400"/>
-              <a:buChar char="●"/>
+            <a:pPr marL="139700" lvl="0">
+              <a:buClr>
+                <a:srgbClr val="000000"/>
+              </a:buClr>
+              <a:buSzPts val="1400"/>
             </a:pPr>
             <a:r>
               <a:rPr lang="en-US" sz="2000" dirty="0">
@@ -9106,7 +8151,7 @@
                 <a:ea typeface="Calibri" panose="020F0502020204030204" pitchFamily="34" charset="0"/>
                 <a:cs typeface="Times New Roman" panose="02020603050405020304" pitchFamily="18" charset="0"/>
               </a:rPr>
-              <a:t>Helps both students and teachers  </a:t>
+              <a:t>It also supports teachers by automating repetitive tasks and improving decision-making through data insights.</a:t>
             </a:r>
           </a:p>
           <a:p>
@@ -9121,29 +8166,6 @@
               <a:solidFill>
                 <a:srgbClr val="000000"/>
               </a:solidFill>
-              <a:ea typeface="Calibri" panose="020F0502020204030204" pitchFamily="34" charset="0"/>
-              <a:cs typeface="Times New Roman" panose="02020603050405020304" pitchFamily="18" charset="0"/>
-            </a:endParaRPr>
-          </a:p>
-          <a:p>
-            <a:pPr marL="457200" lvl="0" indent="-317500">
-              <a:buClr>
-                <a:srgbClr val="000000"/>
-              </a:buClr>
-              <a:buSzPts val="1400"/>
-              <a:buChar char="●"/>
-            </a:pPr>
-            <a:r>
-              <a:rPr lang="en-US" sz="2000" dirty="0">
-                <a:solidFill>
-                  <a:srgbClr val="000000"/>
-                </a:solidFill>
-                <a:ea typeface="Calibri" panose="020F0502020204030204" pitchFamily="34" charset="0"/>
-                <a:cs typeface="Times New Roman" panose="02020603050405020304" pitchFamily="18" charset="0"/>
-              </a:rPr>
-              <a:t>AI makes learning more interactive and data-driven </a:t>
-            </a:r>
-            <a:endParaRPr lang="en-US" sz="3600" dirty="0">
               <a:ea typeface="Calibri" panose="020F0502020204030204" pitchFamily="34" charset="0"/>
               <a:cs typeface="Times New Roman" panose="02020603050405020304" pitchFamily="18" charset="0"/>
             </a:endParaRPr>
@@ -9327,586 +8349,6 @@
         </p:txBody>
       </p:sp>
     </p:spTree>
-  </p:cSld>
-  <p:clrMapOvr>
-    <a:masterClrMapping/>
-  </p:clrMapOvr>
-</p:sld>
-</file>
-
-<file path=ppt/slides/slide20.xml><?xml version="1.0" encoding="utf-8"?>
-<p:sld xmlns:a="http://schemas.openxmlformats.org/drawingml/2006/main" xmlns:r="http://schemas.openxmlformats.org/officeDocument/2006/relationships" xmlns:p="http://schemas.openxmlformats.org/presentationml/2006/main">
-  <p:cSld>
-    <p:spTree>
-      <p:nvGrpSpPr>
-        <p:cNvPr id="1" name=""/>
-        <p:cNvGrpSpPr/>
-        <p:nvPr/>
-      </p:nvGrpSpPr>
-      <p:grpSpPr>
-        <a:xfrm>
-          <a:off x="0" y="0"/>
-          <a:ext cx="0" cy="0"/>
-          <a:chOff x="0" y="0"/>
-          <a:chExt cx="0" cy="0"/>
-        </a:xfrm>
-      </p:grpSpPr>
-      <p:sp>
-        <p:nvSpPr>
-          <p:cNvPr id="108" name="TextShape 1"/>
-          <p:cNvSpPr txBox="1"/>
-          <p:nvPr/>
-        </p:nvSpPr>
-        <p:spPr>
-          <a:xfrm>
-            <a:off x="457200" y="0"/>
-            <a:ext cx="6019560" cy="837720"/>
-          </a:xfrm>
-          <a:prstGeom prst="rect">
-            <a:avLst/>
-          </a:prstGeom>
-          <a:noFill/>
-          <a:ln w="9360">
-            <a:noFill/>
-          </a:ln>
-        </p:spPr>
-        <p:txBody>
-          <a:bodyPr anchor="ctr">
-            <a:noAutofit/>
-          </a:bodyPr>
-          <a:lstStyle/>
-          <a:p>
-            <a:pPr algn="ctr">
-              <a:lnSpc>
-                <a:spcPct val="100000"/>
-              </a:lnSpc>
-            </a:pPr>
-            <a:r>
-              <a:rPr lang="en" sz="3200" dirty="0">
-                <a:latin typeface="Times New Roman" panose="02020603050405020304" pitchFamily="18" charset="0"/>
-                <a:cs typeface="Times New Roman" panose="02020603050405020304" pitchFamily="18" charset="0"/>
-              </a:rPr>
-              <a:t>Future Scope </a:t>
-            </a:r>
-            <a:endParaRPr lang="en-US" sz="3000" b="0" strike="noStrike" spc="-1" dirty="0">
-              <a:solidFill>
-                <a:srgbClr val="000000"/>
-              </a:solidFill>
-              <a:latin typeface="Times New Roman" panose="02020603050405020304" pitchFamily="18" charset="0"/>
-              <a:cs typeface="Times New Roman" panose="02020603050405020304" pitchFamily="18" charset="0"/>
-            </a:endParaRPr>
-          </a:p>
-        </p:txBody>
-      </p:sp>
-      <p:sp>
-        <p:nvSpPr>
-          <p:cNvPr id="110" name="TextShape 3"/>
-          <p:cNvSpPr txBox="1"/>
-          <p:nvPr/>
-        </p:nvSpPr>
-        <p:spPr>
-          <a:xfrm>
-            <a:off x="6553080" y="6356520"/>
-            <a:ext cx="2133360" cy="364680"/>
-          </a:xfrm>
-          <a:prstGeom prst="rect">
-            <a:avLst/>
-          </a:prstGeom>
-          <a:noFill/>
-          <a:ln>
-            <a:noFill/>
-          </a:ln>
-        </p:spPr>
-        <p:txBody>
-          <a:bodyPr anchor="ctr">
-            <a:noAutofit/>
-          </a:bodyPr>
-          <a:lstStyle/>
-          <a:p>
-            <a:pPr algn="r">
-              <a:lnSpc>
-                <a:spcPct val="100000"/>
-              </a:lnSpc>
-            </a:pPr>
-            <a:fld id="{4D4FEEEE-7AC5-48A9-86F4-13448BE87B58}" type="slidenum">
-              <a:rPr lang="en-US" sz="1200" b="1" strike="noStrike" spc="-1">
-                <a:solidFill>
-                  <a:srgbClr val="000000"/>
-                </a:solidFill>
-                <a:latin typeface="Calibri"/>
-                <a:ea typeface="MS PGothic"/>
-              </a:rPr>
-              <a:pPr algn="r">
-                <a:lnSpc>
-                  <a:spcPct val="100000"/>
-                </a:lnSpc>
-              </a:pPr>
-              <a:t>20</a:t>
-            </a:fld>
-            <a:endParaRPr lang="en-GB" sz="1200" b="0" strike="noStrike" spc="-1">
-              <a:latin typeface="Times New Roman"/>
-            </a:endParaRPr>
-          </a:p>
-        </p:txBody>
-      </p:sp>
-      <p:sp>
-        <p:nvSpPr>
-          <p:cNvPr id="5" name="TextShape 2"/>
-          <p:cNvSpPr txBox="1">
-            <a:spLocks noGrp="1" noRot="1" noMove="1" noResize="1" noEditPoints="1" noAdjustHandles="1" noChangeArrowheads="1" noChangeShapeType="1"/>
-          </p:cNvSpPr>
-          <p:nvPr/>
-        </p:nvSpPr>
-        <p:spPr>
-          <a:xfrm>
-            <a:off x="164008" y="1109742"/>
-            <a:ext cx="8838720" cy="4838571"/>
-          </a:xfrm>
-          <a:prstGeom prst="rect">
-            <a:avLst/>
-          </a:prstGeom>
-          <a:noFill/>
-          <a:ln w="9360">
-            <a:noFill/>
-          </a:ln>
-        </p:spPr>
-        <p:txBody>
-          <a:bodyPr>
-            <a:noAutofit/>
-          </a:bodyPr>
-          <a:lstStyle/>
-          <a:p>
-            <a:pPr>
-              <a:lnSpc>
-                <a:spcPct val="150000"/>
-              </a:lnSpc>
-              <a:spcBef>
-                <a:spcPts val="400"/>
-              </a:spcBef>
-            </a:pPr>
-            <a:endParaRPr lang="en-US" sz="1900" b="0" strike="noStrike" spc="-1" dirty="0">
-              <a:solidFill>
-                <a:srgbClr val="000000"/>
-              </a:solidFill>
-              <a:latin typeface="Calibri"/>
-            </a:endParaRPr>
-          </a:p>
-          <a:p>
-            <a:pPr marL="457200" lvl="0" indent="-317500">
-              <a:buClr>
-                <a:srgbClr val="000000"/>
-              </a:buClr>
-              <a:buSzPts val="1400"/>
-              <a:buChar char="●"/>
-            </a:pPr>
-            <a:r>
-              <a:rPr lang="en-IN" sz="2000" dirty="0"/>
-              <a:t>Study more AI tools (Gemini, Copilot) </a:t>
-            </a:r>
-          </a:p>
-          <a:p>
-            <a:pPr marL="457200" lvl="0" indent="-317500">
-              <a:buClr>
-                <a:srgbClr val="000000"/>
-              </a:buClr>
-              <a:buSzPts val="1400"/>
-              <a:buChar char="●"/>
-            </a:pPr>
-            <a:endParaRPr lang="en-US" sz="2000" dirty="0"/>
-          </a:p>
-          <a:p>
-            <a:pPr marL="457200" lvl="0" indent="-317500">
-              <a:buClr>
-                <a:srgbClr val="000000"/>
-              </a:buClr>
-              <a:buSzPts val="1400"/>
-              <a:buChar char="●"/>
-            </a:pPr>
-            <a:r>
-              <a:rPr lang="en-US" sz="2000" dirty="0"/>
-              <a:t>Long-term impact analysis </a:t>
-            </a:r>
-          </a:p>
-          <a:p>
-            <a:pPr marL="457200" lvl="0" indent="-317500">
-              <a:buClr>
-                <a:srgbClr val="000000"/>
-              </a:buClr>
-              <a:buSzPts val="1400"/>
-              <a:buChar char="●"/>
-            </a:pPr>
-            <a:endParaRPr lang="en-IN" sz="2000" dirty="0"/>
-          </a:p>
-          <a:p>
-            <a:pPr marL="457200" lvl="0" indent="-317500">
-              <a:buClr>
-                <a:srgbClr val="000000"/>
-              </a:buClr>
-              <a:buSzPts val="1400"/>
-              <a:buChar char="●"/>
-            </a:pPr>
-            <a:r>
-              <a:rPr lang="en-US" sz="2000" dirty="0">
-                <a:solidFill>
-                  <a:srgbClr val="000000"/>
-                </a:solidFill>
-                <a:ea typeface="Calibri" panose="020F0502020204030204" pitchFamily="34" charset="0"/>
-                <a:cs typeface="Times New Roman" panose="02020603050405020304" pitchFamily="18" charset="0"/>
-              </a:rPr>
-              <a:t>Integration with VR &amp; advanced tech </a:t>
-            </a:r>
-          </a:p>
-          <a:p>
-            <a:pPr marL="457200" lvl="0" indent="-317500">
-              <a:buClr>
-                <a:srgbClr val="000000"/>
-              </a:buClr>
-              <a:buSzPts val="1400"/>
-              <a:buChar char="●"/>
-            </a:pPr>
-            <a:endParaRPr lang="en-US" sz="2000" dirty="0">
-              <a:solidFill>
-                <a:srgbClr val="000000"/>
-              </a:solidFill>
-              <a:ea typeface="Calibri" panose="020F0502020204030204" pitchFamily="34" charset="0"/>
-              <a:cs typeface="Times New Roman" panose="02020603050405020304" pitchFamily="18" charset="0"/>
-            </a:endParaRPr>
-          </a:p>
-          <a:p>
-            <a:pPr marL="457200" lvl="0" indent="-317500">
-              <a:buClr>
-                <a:srgbClr val="000000"/>
-              </a:buClr>
-              <a:buSzPts val="1400"/>
-              <a:buChar char="●"/>
-            </a:pPr>
-            <a:r>
-              <a:rPr lang="en-US" sz="2000" dirty="0">
-                <a:solidFill>
-                  <a:srgbClr val="000000"/>
-                </a:solidFill>
-                <a:ea typeface="Calibri" panose="020F0502020204030204" pitchFamily="34" charset="0"/>
-                <a:cs typeface="Times New Roman" panose="02020603050405020304" pitchFamily="18" charset="0"/>
-              </a:rPr>
-              <a:t>Ethical improvement </a:t>
-            </a:r>
-            <a:endParaRPr lang="en-US" sz="3600" dirty="0">
-              <a:ea typeface="Calibri" panose="020F0502020204030204" pitchFamily="34" charset="0"/>
-              <a:cs typeface="Times New Roman" panose="02020603050405020304" pitchFamily="18" charset="0"/>
-            </a:endParaRPr>
-          </a:p>
-          <a:p>
-            <a:pPr>
-              <a:lnSpc>
-                <a:spcPct val="100000"/>
-              </a:lnSpc>
-              <a:spcBef>
-                <a:spcPts val="400"/>
-              </a:spcBef>
-            </a:pPr>
-            <a:endParaRPr lang="en-US" sz="1900" b="0" strike="noStrike" spc="-1" dirty="0">
-              <a:solidFill>
-                <a:srgbClr val="000000"/>
-              </a:solidFill>
-              <a:latin typeface="Calibri"/>
-            </a:endParaRPr>
-          </a:p>
-          <a:p>
-            <a:pPr>
-              <a:lnSpc>
-                <a:spcPct val="100000"/>
-              </a:lnSpc>
-              <a:spcBef>
-                <a:spcPts val="400"/>
-              </a:spcBef>
-            </a:pPr>
-            <a:endParaRPr lang="en-US" sz="1900" spc="-1" dirty="0">
-              <a:solidFill>
-                <a:srgbClr val="000000"/>
-              </a:solidFill>
-              <a:latin typeface="Calibri"/>
-            </a:endParaRPr>
-          </a:p>
-          <a:p>
-            <a:pPr>
-              <a:lnSpc>
-                <a:spcPct val="150000"/>
-              </a:lnSpc>
-              <a:spcBef>
-                <a:spcPts val="400"/>
-              </a:spcBef>
-            </a:pPr>
-            <a:endParaRPr lang="en-US" sz="1900" b="0" strike="noStrike" spc="-1" dirty="0">
-              <a:solidFill>
-                <a:srgbClr val="000000"/>
-              </a:solidFill>
-              <a:latin typeface="Calibri"/>
-            </a:endParaRPr>
-          </a:p>
-          <a:p>
-            <a:pPr>
-              <a:lnSpc>
-                <a:spcPct val="150000"/>
-              </a:lnSpc>
-              <a:spcBef>
-                <a:spcPts val="400"/>
-              </a:spcBef>
-            </a:pPr>
-            <a:endParaRPr lang="en-US" sz="1900" b="0" strike="noStrike" spc="-1" dirty="0">
-              <a:solidFill>
-                <a:srgbClr val="000000"/>
-              </a:solidFill>
-              <a:latin typeface="Calibri"/>
-            </a:endParaRPr>
-          </a:p>
-          <a:p>
-            <a:pPr>
-              <a:lnSpc>
-                <a:spcPct val="150000"/>
-              </a:lnSpc>
-              <a:spcBef>
-                <a:spcPts val="400"/>
-              </a:spcBef>
-            </a:pPr>
-            <a:endParaRPr lang="en-US" sz="1900" b="0" strike="noStrike" spc="-1" dirty="0">
-              <a:solidFill>
-                <a:srgbClr val="000000"/>
-              </a:solidFill>
-              <a:latin typeface="Calibri"/>
-            </a:endParaRPr>
-          </a:p>
-          <a:p>
-            <a:pPr>
-              <a:lnSpc>
-                <a:spcPct val="150000"/>
-              </a:lnSpc>
-              <a:spcBef>
-                <a:spcPts val="400"/>
-              </a:spcBef>
-            </a:pPr>
-            <a:endParaRPr lang="en-US" sz="1900" b="0" strike="noStrike" spc="-1" dirty="0">
-              <a:solidFill>
-                <a:srgbClr val="000000"/>
-              </a:solidFill>
-              <a:latin typeface="Calibri"/>
-            </a:endParaRPr>
-          </a:p>
-          <a:p>
-            <a:pPr>
-              <a:lnSpc>
-                <a:spcPct val="100000"/>
-              </a:lnSpc>
-              <a:spcBef>
-                <a:spcPts val="400"/>
-              </a:spcBef>
-            </a:pPr>
-            <a:endParaRPr lang="en-US" sz="1900" b="0" strike="noStrike" spc="-1" dirty="0">
-              <a:solidFill>
-                <a:srgbClr val="000000"/>
-              </a:solidFill>
-              <a:latin typeface="Calibri"/>
-            </a:endParaRPr>
-          </a:p>
-          <a:p>
-            <a:pPr>
-              <a:lnSpc>
-                <a:spcPct val="100000"/>
-              </a:lnSpc>
-              <a:spcBef>
-                <a:spcPts val="400"/>
-              </a:spcBef>
-            </a:pPr>
-            <a:endParaRPr lang="en-US" sz="1900" b="0" strike="noStrike" spc="-1" dirty="0">
-              <a:solidFill>
-                <a:srgbClr val="000000"/>
-              </a:solidFill>
-              <a:latin typeface="Calibri"/>
-            </a:endParaRPr>
-          </a:p>
-          <a:p>
-            <a:pPr>
-              <a:lnSpc>
-                <a:spcPct val="100000"/>
-              </a:lnSpc>
-              <a:spcBef>
-                <a:spcPts val="400"/>
-              </a:spcBef>
-            </a:pPr>
-            <a:endParaRPr lang="en-US" sz="1900" b="0" strike="noStrike" spc="-1" dirty="0">
-              <a:solidFill>
-                <a:srgbClr val="000000"/>
-              </a:solidFill>
-              <a:latin typeface="Calibri"/>
-            </a:endParaRPr>
-          </a:p>
-          <a:p>
-            <a:pPr>
-              <a:lnSpc>
-                <a:spcPct val="100000"/>
-              </a:lnSpc>
-              <a:spcBef>
-                <a:spcPts val="400"/>
-              </a:spcBef>
-            </a:pPr>
-            <a:endParaRPr lang="en-US" sz="1900" b="0" strike="noStrike" spc="-1" dirty="0">
-              <a:solidFill>
-                <a:srgbClr val="000000"/>
-              </a:solidFill>
-              <a:latin typeface="Calibri"/>
-            </a:endParaRPr>
-          </a:p>
-          <a:p>
-            <a:pPr>
-              <a:lnSpc>
-                <a:spcPct val="100000"/>
-              </a:lnSpc>
-              <a:spcBef>
-                <a:spcPts val="400"/>
-              </a:spcBef>
-            </a:pPr>
-            <a:endParaRPr lang="en-US" sz="1900" b="0" strike="noStrike" spc="-1" dirty="0">
-              <a:solidFill>
-                <a:srgbClr val="000000"/>
-              </a:solidFill>
-              <a:latin typeface="Calibri"/>
-            </a:endParaRPr>
-          </a:p>
-        </p:txBody>
-      </p:sp>
-    </p:spTree>
-    <p:extLst>
-      <p:ext uri="{BB962C8B-B14F-4D97-AF65-F5344CB8AC3E}">
-        <p14:creationId xmlns:p14="http://schemas.microsoft.com/office/powerpoint/2010/main" val="204732330"/>
-      </p:ext>
-    </p:extLst>
-  </p:cSld>
-  <p:clrMapOvr>
-    <a:masterClrMapping/>
-  </p:clrMapOvr>
-</p:sld>
-</file>
-
-<file path=ppt/slides/slide21.xml><?xml version="1.0" encoding="utf-8"?>
-<p:sld xmlns:a="http://schemas.openxmlformats.org/drawingml/2006/main" xmlns:r="http://schemas.openxmlformats.org/officeDocument/2006/relationships" xmlns:p="http://schemas.openxmlformats.org/presentationml/2006/main">
-  <p:cSld>
-    <p:spTree>
-      <p:nvGrpSpPr>
-        <p:cNvPr id="1" name=""/>
-        <p:cNvGrpSpPr/>
-        <p:nvPr/>
-      </p:nvGrpSpPr>
-      <p:grpSpPr>
-        <a:xfrm>
-          <a:off x="0" y="0"/>
-          <a:ext cx="0" cy="0"/>
-          <a:chOff x="0" y="0"/>
-          <a:chExt cx="0" cy="0"/>
-        </a:xfrm>
-      </p:grpSpPr>
-      <p:sp>
-        <p:nvSpPr>
-          <p:cNvPr id="108" name="TextShape 1"/>
-          <p:cNvSpPr txBox="1"/>
-          <p:nvPr/>
-        </p:nvSpPr>
-        <p:spPr>
-          <a:xfrm>
-            <a:off x="1297577" y="2821578"/>
-            <a:ext cx="6705599" cy="1410788"/>
-          </a:xfrm>
-          <a:prstGeom prst="rect">
-            <a:avLst/>
-          </a:prstGeom>
-          <a:noFill/>
-          <a:ln w="9360">
-            <a:noFill/>
-          </a:ln>
-        </p:spPr>
-        <p:txBody>
-          <a:bodyPr anchor="ctr">
-            <a:noAutofit/>
-          </a:bodyPr>
-          <a:lstStyle/>
-          <a:p>
-            <a:pPr algn="ctr">
-              <a:lnSpc>
-                <a:spcPct val="100000"/>
-              </a:lnSpc>
-            </a:pPr>
-            <a:r>
-              <a:rPr lang="en" sz="5400" dirty="0">
-                <a:latin typeface="Times New Roman" panose="02020603050405020304" pitchFamily="18" charset="0"/>
-                <a:cs typeface="Times New Roman" panose="02020603050405020304" pitchFamily="18" charset="0"/>
-              </a:rPr>
-              <a:t>Thank You</a:t>
-            </a:r>
-            <a:endParaRPr lang="en-US" sz="5400" b="0" strike="noStrike" spc="-1" dirty="0">
-              <a:solidFill>
-                <a:srgbClr val="000000"/>
-              </a:solidFill>
-              <a:latin typeface="Times New Roman" panose="02020603050405020304" pitchFamily="18" charset="0"/>
-              <a:cs typeface="Times New Roman" panose="02020603050405020304" pitchFamily="18" charset="0"/>
-            </a:endParaRPr>
-          </a:p>
-        </p:txBody>
-      </p:sp>
-      <p:sp>
-        <p:nvSpPr>
-          <p:cNvPr id="110" name="TextShape 3"/>
-          <p:cNvSpPr txBox="1"/>
-          <p:nvPr/>
-        </p:nvSpPr>
-        <p:spPr>
-          <a:xfrm>
-            <a:off x="6553080" y="6356520"/>
-            <a:ext cx="2133360" cy="364680"/>
-          </a:xfrm>
-          <a:prstGeom prst="rect">
-            <a:avLst/>
-          </a:prstGeom>
-          <a:noFill/>
-          <a:ln>
-            <a:noFill/>
-          </a:ln>
-        </p:spPr>
-        <p:txBody>
-          <a:bodyPr anchor="ctr">
-            <a:noAutofit/>
-          </a:bodyPr>
-          <a:lstStyle/>
-          <a:p>
-            <a:pPr algn="r">
-              <a:lnSpc>
-                <a:spcPct val="100000"/>
-              </a:lnSpc>
-            </a:pPr>
-            <a:fld id="{4D4FEEEE-7AC5-48A9-86F4-13448BE87B58}" type="slidenum">
-              <a:rPr lang="en-US" sz="1200" b="1" strike="noStrike" spc="-1">
-                <a:solidFill>
-                  <a:srgbClr val="000000"/>
-                </a:solidFill>
-                <a:latin typeface="Calibri"/>
-                <a:ea typeface="MS PGothic"/>
-              </a:rPr>
-              <a:pPr algn="r">
-                <a:lnSpc>
-                  <a:spcPct val="100000"/>
-                </a:lnSpc>
-              </a:pPr>
-              <a:t>21</a:t>
-            </a:fld>
-            <a:endParaRPr lang="en-GB" sz="1200" b="0" strike="noStrike" spc="-1">
-              <a:latin typeface="Times New Roman"/>
-            </a:endParaRPr>
-          </a:p>
-        </p:txBody>
-      </p:sp>
-    </p:spTree>
-    <p:extLst>
-      <p:ext uri="{BB962C8B-B14F-4D97-AF65-F5344CB8AC3E}">
-        <p14:creationId xmlns:p14="http://schemas.microsoft.com/office/powerpoint/2010/main" val="2834479809"/>
-      </p:ext>
-    </p:extLst>
   </p:cSld>
   <p:clrMapOvr>
     <a:masterClrMapping/>
@@ -10072,6 +8514,18 @@
             </a:endParaRPr>
           </a:p>
           <a:p>
+            <a:pPr marL="139700" lvl="0">
+              <a:buClr>
+                <a:srgbClr val="000000"/>
+              </a:buClr>
+              <a:buSzPts val="1400"/>
+            </a:pPr>
+            <a:r>
+              <a:rPr lang="en-IN" sz="2000" dirty="0"/>
+              <a:t>The traditional education system faces several limitations:</a:t>
+            </a:r>
+          </a:p>
+          <a:p>
             <a:pPr marL="457200" lvl="0" indent="-317500">
               <a:buClr>
                 <a:srgbClr val="000000"/>
@@ -10079,10 +8533,7 @@
               <a:buSzPts val="1400"/>
               <a:buChar char="●"/>
             </a:pPr>
-            <a:r>
-              <a:rPr lang="en-IN" sz="2000" dirty="0"/>
-              <a:t>One size fits all learning system  </a:t>
-            </a:r>
+            <a:endParaRPr lang="en-US" sz="2000" dirty="0"/>
           </a:p>
           <a:p>
             <a:pPr marL="457200" lvl="0" indent="-317500">
@@ -10092,19 +8543,9 @@
               <a:buSzPts val="1400"/>
               <a:buChar char="●"/>
             </a:pPr>
-            <a:endParaRPr lang="en-US" sz="2000" dirty="0"/>
-          </a:p>
-          <a:p>
-            <a:pPr marL="457200" lvl="0" indent="-317500">
-              <a:buClr>
-                <a:srgbClr val="000000"/>
-              </a:buClr>
-              <a:buSzPts val="1400"/>
-              <a:buChar char="●"/>
-            </a:pPr>
             <a:r>
               <a:rPr lang="en-US" sz="2000" dirty="0"/>
-              <a:t>Students learn at different speeds </a:t>
+              <a:t>Uniform teaching methods ignore individual learning differences </a:t>
             </a:r>
           </a:p>
           <a:p>
@@ -10133,7 +8574,7 @@
                 <a:ea typeface="Calibri" panose="020F0502020204030204" pitchFamily="34" charset="0"/>
                 <a:cs typeface="Times New Roman" panose="02020603050405020304" pitchFamily="18" charset="0"/>
               </a:rPr>
-              <a:t>High teachers workload (grading, tracking, etc.)</a:t>
+              <a:t>Students learn at different speeds, leading to gaps in understanding </a:t>
             </a:r>
           </a:p>
           <a:p>
@@ -10168,7 +8609,76 @@
                 <a:ea typeface="Calibri" panose="020F0502020204030204" pitchFamily="34" charset="0"/>
                 <a:cs typeface="Times New Roman" panose="02020603050405020304" pitchFamily="18" charset="0"/>
               </a:rPr>
-              <a:t>Lack of personalization </a:t>
+              <a:t>Teachers face high workload due to grading, tracking, and administration </a:t>
+            </a:r>
+          </a:p>
+          <a:p>
+            <a:pPr marL="457200" lvl="0" indent="-317500">
+              <a:buClr>
+                <a:srgbClr val="000000"/>
+              </a:buClr>
+              <a:buSzPts val="1400"/>
+              <a:buChar char="●"/>
+            </a:pPr>
+            <a:endParaRPr lang="en-US" sz="2000" dirty="0">
+              <a:solidFill>
+                <a:srgbClr val="000000"/>
+              </a:solidFill>
+              <a:ea typeface="Calibri" panose="020F0502020204030204" pitchFamily="34" charset="0"/>
+              <a:cs typeface="Times New Roman" panose="02020603050405020304" pitchFamily="18" charset="0"/>
+            </a:endParaRPr>
+          </a:p>
+          <a:p>
+            <a:pPr marL="457200" lvl="0" indent="-317500">
+              <a:buClr>
+                <a:srgbClr val="000000"/>
+              </a:buClr>
+              <a:buSzPts val="1400"/>
+              <a:buChar char="●"/>
+            </a:pPr>
+            <a:r>
+              <a:rPr lang="en-US" sz="2000" dirty="0">
+                <a:solidFill>
+                  <a:srgbClr val="000000"/>
+                </a:solidFill>
+                <a:ea typeface="Calibri" panose="020F0502020204030204" pitchFamily="34" charset="0"/>
+                <a:cs typeface="Times New Roman" panose="02020603050405020304" pitchFamily="18" charset="0"/>
+              </a:rPr>
+              <a:t>Lack of personalization feedback reduces learning efficiency </a:t>
+            </a:r>
+          </a:p>
+          <a:p>
+            <a:pPr marL="457200" lvl="0" indent="-317500">
+              <a:buClr>
+                <a:srgbClr val="000000"/>
+              </a:buClr>
+              <a:buSzPts val="1400"/>
+              <a:buChar char="●"/>
+            </a:pPr>
+            <a:endParaRPr lang="en-US" sz="2000" dirty="0">
+              <a:solidFill>
+                <a:srgbClr val="000000"/>
+              </a:solidFill>
+              <a:ea typeface="Calibri" panose="020F0502020204030204" pitchFamily="34" charset="0"/>
+              <a:cs typeface="Times New Roman" panose="02020603050405020304" pitchFamily="18" charset="0"/>
+            </a:endParaRPr>
+          </a:p>
+          <a:p>
+            <a:pPr marL="139700" lvl="0">
+              <a:buClr>
+                <a:srgbClr val="000000"/>
+              </a:buClr>
+              <a:buSzPts val="1400"/>
+            </a:pPr>
+            <a:r>
+              <a:rPr lang="en-US" sz="2000" dirty="0">
+                <a:solidFill>
+                  <a:srgbClr val="000000"/>
+                </a:solidFill>
+                <a:ea typeface="Calibri" panose="020F0502020204030204" pitchFamily="34" charset="0"/>
+                <a:cs typeface="Times New Roman" panose="02020603050405020304" pitchFamily="18" charset="0"/>
+              </a:rPr>
+              <a:t>These challenges highlight the need for an intelligent system that can adapt to diverse learning outcomes.</a:t>
             </a:r>
             <a:endParaRPr lang="en-US" sz="3600" dirty="0">
               <a:ea typeface="Calibri" panose="020F0502020204030204" pitchFamily="34" charset="0"/>
@@ -10527,6 +9037,18 @@
             </a:endParaRPr>
           </a:p>
           <a:p>
+            <a:pPr marL="139700" lvl="0">
+              <a:buClr>
+                <a:srgbClr val="000000"/>
+              </a:buClr>
+              <a:buSzPts val="1400"/>
+            </a:pPr>
+            <a:r>
+              <a:rPr lang="en-IN" sz="2000" dirty="0"/>
+              <a:t>The main objectives of this study are:</a:t>
+            </a:r>
+          </a:p>
+          <a:p>
             <a:pPr marL="457200" lvl="0" indent="-317500">
               <a:buClr>
                 <a:srgbClr val="000000"/>
@@ -10534,13 +9056,28 @@
               <a:buSzPts val="1400"/>
               <a:buChar char="●"/>
             </a:pPr>
+            <a:endParaRPr lang="en-IN" sz="2000" dirty="0"/>
+          </a:p>
+          <a:p>
+            <a:pPr marL="457200" indent="-317500">
+              <a:buClr>
+                <a:srgbClr val="000000"/>
+              </a:buClr>
+              <a:buSzPts val="1400"/>
+              <a:buFontTx/>
+              <a:buChar char="●"/>
+            </a:pPr>
+            <a:r>
+              <a:rPr lang="en-IN" sz="2000" dirty="0"/>
+              <a:t>To </a:t>
+            </a:r>
             <a:r>
               <a:rPr lang="en-IN" sz="2000" dirty="0" err="1"/>
-              <a:t>Analyze</a:t>
+              <a:t>analyze</a:t>
             </a:r>
             <a:r>
               <a:rPr lang="en-IN" sz="2000" dirty="0"/>
-              <a:t> impact of AI on education </a:t>
+              <a:t> impact of AI on student learning and teaching efficiency </a:t>
             </a:r>
           </a:p>
           <a:p>
@@ -10562,7 +9099,7 @@
             </a:pPr>
             <a:r>
               <a:rPr lang="en-US" sz="2000" dirty="0"/>
-              <a:t>Compare different AI tools </a:t>
+              <a:t>To compare the performance of different AI tools in education</a:t>
             </a:r>
           </a:p>
           <a:p>
@@ -10591,7 +9128,7 @@
                 <a:ea typeface="Calibri" panose="020F0502020204030204" pitchFamily="34" charset="0"/>
                 <a:cs typeface="Times New Roman" panose="02020603050405020304" pitchFamily="18" charset="0"/>
               </a:rPr>
-              <a:t>Evaluate learning performance</a:t>
+              <a:t>To evaluate both quantitative and qualitative learning outcomes </a:t>
             </a:r>
           </a:p>
           <a:p>
@@ -10626,7 +9163,7 @@
                 <a:ea typeface="Calibri" panose="020F0502020204030204" pitchFamily="34" charset="0"/>
                 <a:cs typeface="Times New Roman" panose="02020603050405020304" pitchFamily="18" charset="0"/>
               </a:rPr>
-              <a:t>Identify benefits and challenges </a:t>
+              <a:t>To identify benefits, limitations, and real-worlds implications of AI</a:t>
             </a:r>
             <a:endParaRPr lang="en-US" sz="3600" dirty="0">
               <a:ea typeface="Calibri" panose="020F0502020204030204" pitchFamily="34" charset="0"/>
@@ -10985,6 +9522,69 @@
             </a:endParaRPr>
           </a:p>
           <a:p>
+            <a:pPr marL="139700" lvl="0">
+              <a:buClr>
+                <a:srgbClr val="000000"/>
+              </a:buClr>
+              <a:buSzPts val="1400"/>
+            </a:pPr>
+            <a:r>
+              <a:rPr lang="en-IN" sz="2000" dirty="0"/>
+              <a:t>Recent studies show that AI significantly improves personalization learning by adapting content based on student performance.</a:t>
+            </a:r>
+          </a:p>
+          <a:p>
+            <a:pPr marL="139700" lvl="0">
+              <a:buClr>
+                <a:srgbClr val="000000"/>
+              </a:buClr>
+              <a:buSzPts val="1400"/>
+            </a:pPr>
+            <a:endParaRPr lang="en-US" sz="2000" dirty="0"/>
+          </a:p>
+          <a:p>
+            <a:pPr marL="139700" lvl="0">
+              <a:buClr>
+                <a:srgbClr val="000000"/>
+              </a:buClr>
+              <a:buSzPts val="1400"/>
+            </a:pPr>
+            <a:r>
+              <a:rPr lang="en-US" sz="2000" dirty="0"/>
+              <a:t>Generative AI tools like ChatGPT enhances engagement and support independent learning. </a:t>
+            </a:r>
+          </a:p>
+          <a:p>
+            <a:pPr marL="139700" lvl="0">
+              <a:buClr>
+                <a:srgbClr val="000000"/>
+              </a:buClr>
+              <a:buSzPts val="1400"/>
+            </a:pPr>
+            <a:endParaRPr lang="en-US" sz="2000" dirty="0"/>
+          </a:p>
+          <a:p>
+            <a:pPr marL="139700" lvl="0">
+              <a:buClr>
+                <a:srgbClr val="000000"/>
+              </a:buClr>
+              <a:buSzPts val="1400"/>
+            </a:pPr>
+            <a:r>
+              <a:rPr lang="en-US" sz="2000" dirty="0"/>
+              <a:t>Research also indicates that AI reduces task completion time and increased productivity in academic activities </a:t>
+            </a:r>
+          </a:p>
+          <a:p>
+            <a:pPr marL="139700" lvl="0">
+              <a:buClr>
+                <a:srgbClr val="000000"/>
+              </a:buClr>
+              <a:buSzPts val="1400"/>
+            </a:pPr>
+            <a:endParaRPr lang="en-US" sz="2000" dirty="0"/>
+          </a:p>
+          <a:p>
             <a:pPr marL="457200" lvl="0" indent="-317500">
               <a:buClr>
                 <a:srgbClr val="000000"/>
@@ -10992,10 +9592,7 @@
               <a:buSzPts val="1400"/>
               <a:buChar char="●"/>
             </a:pPr>
-            <a:r>
-              <a:rPr lang="en-IN" sz="2000" dirty="0"/>
-              <a:t>AI improves personalized learning </a:t>
-            </a:r>
+            <a:endParaRPr lang="en-IN" sz="2000" dirty="0"/>
           </a:p>
           <a:p>
             <a:pPr marL="139700" lvl="0">
@@ -11003,39 +9600,6 @@
                 <a:srgbClr val="000000"/>
               </a:buClr>
               <a:buSzPts val="1400"/>
-            </a:pPr>
-            <a:endParaRPr lang="en-US" sz="2000" dirty="0"/>
-          </a:p>
-          <a:p>
-            <a:pPr marL="457200" lvl="0" indent="-317500">
-              <a:buClr>
-                <a:srgbClr val="000000"/>
-              </a:buClr>
-              <a:buSzPts val="1400"/>
-              <a:buChar char="●"/>
-            </a:pPr>
-            <a:r>
-              <a:rPr lang="en-US" sz="2000" dirty="0"/>
-              <a:t>Generative AI (like ChatGPT) increases engagement </a:t>
-            </a:r>
-          </a:p>
-          <a:p>
-            <a:pPr marL="457200" lvl="0" indent="-317500">
-              <a:buClr>
-                <a:srgbClr val="000000"/>
-              </a:buClr>
-              <a:buSzPts val="1400"/>
-              <a:buChar char="●"/>
-            </a:pPr>
-            <a:endParaRPr lang="en-IN" sz="2000" dirty="0"/>
-          </a:p>
-          <a:p>
-            <a:pPr marL="457200" lvl="0" indent="-317500">
-              <a:buClr>
-                <a:srgbClr val="000000"/>
-              </a:buClr>
-              <a:buSzPts val="1400"/>
-              <a:buChar char="●"/>
             </a:pPr>
             <a:r>
               <a:rPr lang="en-US" sz="2000" dirty="0">
@@ -11045,7 +9609,7 @@
                 <a:ea typeface="Calibri" panose="020F0502020204030204" pitchFamily="34" charset="0"/>
                 <a:cs typeface="Times New Roman" panose="02020603050405020304" pitchFamily="18" charset="0"/>
               </a:rPr>
-              <a:t>AI helps reduce time in academic tasks </a:t>
+              <a:t>However, most studies lack long-term validation and are limited to small-scale experiments, indicating the need for deeper analysis.</a:t>
             </a:r>
           </a:p>
           <a:p>
@@ -11060,29 +9624,6 @@
               <a:solidFill>
                 <a:srgbClr val="000000"/>
               </a:solidFill>
-              <a:ea typeface="Calibri" panose="020F0502020204030204" pitchFamily="34" charset="0"/>
-              <a:cs typeface="Times New Roman" panose="02020603050405020304" pitchFamily="18" charset="0"/>
-            </a:endParaRPr>
-          </a:p>
-          <a:p>
-            <a:pPr marL="457200" lvl="0" indent="-317500">
-              <a:buClr>
-                <a:srgbClr val="000000"/>
-              </a:buClr>
-              <a:buSzPts val="1400"/>
-              <a:buChar char="●"/>
-            </a:pPr>
-            <a:r>
-              <a:rPr lang="en-US" sz="2000" dirty="0">
-                <a:solidFill>
-                  <a:srgbClr val="000000"/>
-                </a:solidFill>
-                <a:ea typeface="Calibri" panose="020F0502020204030204" pitchFamily="34" charset="0"/>
-                <a:cs typeface="Times New Roman" panose="02020603050405020304" pitchFamily="18" charset="0"/>
-              </a:rPr>
-              <a:t>Still lacks long-term validation </a:t>
-            </a:r>
-            <a:endParaRPr lang="en-US" sz="2000" dirty="0">
               <a:ea typeface="Calibri" panose="020F0502020204030204" pitchFamily="34" charset="0"/>
               <a:cs typeface="Times New Roman" panose="02020603050405020304" pitchFamily="18" charset="0"/>
             </a:endParaRPr>
@@ -11260,6 +9801,18 @@
             </a:endParaRPr>
           </a:p>
           <a:p>
+            <a:pPr marL="139700" lvl="0">
+              <a:buClr>
+                <a:srgbClr val="000000"/>
+              </a:buClr>
+              <a:buSzPts val="1400"/>
+            </a:pPr>
+            <a:r>
+              <a:rPr lang="en-IN" sz="2000" dirty="0"/>
+              <a:t>Despite rapid advancements, existing research has several limitations:</a:t>
+            </a:r>
+          </a:p>
+          <a:p>
             <a:pPr marL="457200" lvl="0" indent="-317500">
               <a:buClr>
                 <a:srgbClr val="000000"/>
@@ -11267,9 +9820,19 @@
               <a:buSzPts val="1400"/>
               <a:buChar char="●"/>
             </a:pPr>
+            <a:endParaRPr lang="en-IN" sz="2000" dirty="0"/>
+          </a:p>
+          <a:p>
+            <a:pPr marL="457200" lvl="0" indent="-317500">
+              <a:buClr>
+                <a:srgbClr val="000000"/>
+              </a:buClr>
+              <a:buSzPts val="1400"/>
+              <a:buChar char="●"/>
+            </a:pPr>
             <a:r>
               <a:rPr lang="en-IN" sz="2000" dirty="0"/>
-              <a:t>Limited real-world evaluation </a:t>
+              <a:t>Limited real-world experimental validation </a:t>
             </a:r>
           </a:p>
           <a:p>
@@ -11292,7 +9855,7 @@
             </a:pPr>
             <a:r>
               <a:rPr lang="en-US" sz="2000" dirty="0"/>
-              <a:t>Lack of long-term studies </a:t>
+              <a:t>Lack of long-term impact analysis </a:t>
             </a:r>
           </a:p>
           <a:p>
@@ -11321,7 +9884,7 @@
                 <a:ea typeface="Calibri" panose="020F0502020204030204" pitchFamily="34" charset="0"/>
                 <a:cs typeface="Times New Roman" panose="02020603050405020304" pitchFamily="18" charset="0"/>
               </a:rPr>
-              <a:t>No standard evaluation method </a:t>
+              <a:t>No standardized evaluation framework for AI tools </a:t>
             </a:r>
           </a:p>
           <a:p>
@@ -11356,11 +9919,63 @@
                 <a:ea typeface="Calibri" panose="020F0502020204030204" pitchFamily="34" charset="0"/>
                 <a:cs typeface="Times New Roman" panose="02020603050405020304" pitchFamily="18" charset="0"/>
               </a:rPr>
-              <a:t>Needs a combined </a:t>
-            </a:r>
-            <a:r>
-              <a:rPr lang="en-US" sz="2000" dirty="0"/>
-              <a:t>evaluation of performance, ethics, and accessibility</a:t>
+              <a:t>Insufficient focus on ethical and accessible issues</a:t>
+            </a:r>
+          </a:p>
+          <a:p>
+            <a:pPr marL="457200" lvl="0" indent="-317500">
+              <a:buClr>
+                <a:srgbClr val="000000"/>
+              </a:buClr>
+              <a:buSzPts val="1400"/>
+              <a:buChar char="●"/>
+            </a:pPr>
+            <a:endParaRPr lang="en-US" sz="2000" b="0" strike="noStrike" spc="-1" dirty="0">
+              <a:solidFill>
+                <a:srgbClr val="000000"/>
+              </a:solidFill>
+              <a:latin typeface="Calibri"/>
+              <a:ea typeface="Calibri" panose="020F0502020204030204" pitchFamily="34" charset="0"/>
+              <a:cs typeface="Times New Roman" panose="02020603050405020304" pitchFamily="18" charset="0"/>
+            </a:endParaRPr>
+          </a:p>
+          <a:p>
+            <a:pPr marL="139700" lvl="0">
+              <a:buClr>
+                <a:srgbClr val="000000"/>
+              </a:buClr>
+              <a:buSzPts val="1400"/>
+            </a:pPr>
+            <a:r>
+              <a:rPr lang="en-US" sz="2000" spc="-1" dirty="0">
+                <a:solidFill>
+                  <a:srgbClr val="000000"/>
+                </a:solidFill>
+                <a:ea typeface="Calibri" panose="020F0502020204030204" pitchFamily="34" charset="0"/>
+                <a:cs typeface="Times New Roman" panose="02020603050405020304" pitchFamily="18" charset="0"/>
+              </a:rPr>
+              <a:t>The</a:t>
+            </a:r>
+            <a:r>
+              <a:rPr lang="en-US" sz="2000" spc="-1" dirty="0">
+                <a:solidFill>
+                  <a:srgbClr val="000000"/>
+                </a:solidFill>
+                <a:latin typeface="Calibri"/>
+                <a:ea typeface="Calibri" panose="020F0502020204030204" pitchFamily="34" charset="0"/>
+                <a:cs typeface="Times New Roman" panose="02020603050405020304" pitchFamily="18" charset="0"/>
+              </a:rPr>
+              <a:t> </a:t>
+            </a:r>
+            <a:r>
+              <a:rPr lang="en-US" sz="2000" spc="-1" dirty="0">
+                <a:solidFill>
+                  <a:srgbClr val="000000"/>
+                </a:solidFill>
+                <a:ea typeface="Calibri" panose="020F0502020204030204" pitchFamily="34" charset="0"/>
+                <a:cs typeface="Times New Roman" panose="02020603050405020304" pitchFamily="18" charset="0"/>
+              </a:rPr>
+              <a:t>study aims to address these gaps by providing a structured and multi-dimensional evaluation. </a:t>
             </a:r>
             <a:endParaRPr lang="en-US" sz="1900" b="0" strike="noStrike" spc="-1" dirty="0">
               <a:solidFill>
@@ -11694,6 +10309,25 @@
                 <a:spcPts val="400"/>
               </a:spcBef>
             </a:pPr>
+            <a:r>
+              <a:rPr lang="en-IN" sz="2000" dirty="0"/>
+              <a:t>The study evaluates different categories of AI tools:</a:t>
+            </a:r>
+            <a:endParaRPr lang="en-US" sz="2000" b="0" strike="noStrike" spc="-1" dirty="0">
+              <a:solidFill>
+                <a:srgbClr val="000000"/>
+              </a:solidFill>
+            </a:endParaRPr>
+          </a:p>
+          <a:p>
+            <a:pPr>
+              <a:lnSpc>
+                <a:spcPct val="150000"/>
+              </a:lnSpc>
+              <a:spcBef>
+                <a:spcPts val="400"/>
+              </a:spcBef>
+            </a:pPr>
             <a:endParaRPr lang="en-US" sz="1900" b="0" strike="noStrike" spc="-1" dirty="0">
               <a:solidFill>
                 <a:srgbClr val="000000"/>
@@ -11711,43 +10345,30 @@
             </a:pPr>
             <a:r>
               <a:rPr lang="en-IN" sz="2000" dirty="0"/>
-              <a:t>ChatGPT – </a:t>
-            </a:r>
+              <a:t>ChatGPT – Provides instant explanation, flexible responses, and support multiple academic tasks </a:t>
+            </a:r>
+          </a:p>
+          <a:p>
+            <a:pPr marL="457200" lvl="0" indent="-317500">
+              <a:buClr>
+                <a:srgbClr val="000000"/>
+              </a:buClr>
+              <a:buSzPts val="1400"/>
+              <a:buChar char="●"/>
+            </a:pPr>
+            <a:endParaRPr lang="en-US" sz="2000" dirty="0"/>
+          </a:p>
+          <a:p>
+            <a:pPr marL="457200" lvl="0" indent="-317500">
+              <a:buClr>
+                <a:srgbClr val="000000"/>
+              </a:buClr>
+              <a:buSzPts val="1400"/>
+              <a:buChar char="●"/>
+            </a:pPr>
             <a:r>
               <a:rPr lang="en-US" sz="2000" dirty="0"/>
-              <a:t>Instant explanations and flexible learning</a:t>
-            </a:r>
-            <a:endParaRPr lang="en-IN" sz="2000" dirty="0"/>
-          </a:p>
-          <a:p>
-            <a:pPr marL="457200" lvl="0" indent="-317500">
-              <a:buClr>
-                <a:srgbClr val="000000"/>
-              </a:buClr>
-              <a:buSzPts val="1400"/>
-              <a:buChar char="●"/>
-            </a:pPr>
-            <a:endParaRPr lang="en-US" sz="2000" dirty="0"/>
-          </a:p>
-          <a:p>
-            <a:pPr marL="457200" lvl="0" indent="-317500">
-              <a:buClr>
-                <a:srgbClr val="000000"/>
-              </a:buClr>
-              <a:buSzPts val="1400"/>
-              <a:buChar char="●"/>
-            </a:pPr>
-            <a:r>
-              <a:rPr lang="en-US" sz="2000" dirty="0"/>
-              <a:t>Intelligent Tutoring System (ITS) – </a:t>
-            </a:r>
-            <a:r>
-              <a:rPr lang="en-IN" sz="2000" dirty="0"/>
-              <a:t>Structured and step-by-step learning</a:t>
-            </a:r>
-            <a:r>
-              <a:rPr lang="en-US" sz="2000" dirty="0"/>
-              <a:t> </a:t>
+              <a:t>Intelligent Tutoring System (ITS) – Offer structured, step-by-step learning with adaptive feedback </a:t>
             </a:r>
           </a:p>
           <a:p>
@@ -11776,7 +10397,7 @@
                 <a:ea typeface="Calibri" panose="020F0502020204030204" pitchFamily="34" charset="0"/>
                 <a:cs typeface="Times New Roman" panose="02020603050405020304" pitchFamily="18" charset="0"/>
               </a:rPr>
-              <a:t>AI Platforms (Khan Academy, Coursera) – Organized courses </a:t>
+              <a:t>AI Learning Platforms – Provide organized courses, progress tracking, and scalability</a:t>
             </a:r>
           </a:p>
           <a:p>
@@ -11811,7 +10432,41 @@
                 <a:ea typeface="Calibri" panose="020F0502020204030204" pitchFamily="34" charset="0"/>
                 <a:cs typeface="Times New Roman" panose="02020603050405020304" pitchFamily="18" charset="0"/>
               </a:rPr>
-              <a:t>Automated Assessment Tools – Fast grading </a:t>
+              <a:t>Automated Assessment Tools – Enable fast and consistent grading </a:t>
+            </a:r>
+          </a:p>
+          <a:p>
+            <a:pPr marL="457200" lvl="0" indent="-317500">
+              <a:buClr>
+                <a:srgbClr val="000000"/>
+              </a:buClr>
+              <a:buSzPts val="1400"/>
+              <a:buChar char="●"/>
+            </a:pPr>
+            <a:endParaRPr lang="en-US" sz="2000" dirty="0">
+              <a:solidFill>
+                <a:srgbClr val="000000"/>
+              </a:solidFill>
+              <a:ea typeface="Calibri" panose="020F0502020204030204" pitchFamily="34" charset="0"/>
+              <a:cs typeface="Times New Roman" panose="02020603050405020304" pitchFamily="18" charset="0"/>
+            </a:endParaRPr>
+          </a:p>
+          <a:p>
+            <a:pPr marL="139700" lvl="0">
+              <a:buClr>
+                <a:srgbClr val="000000"/>
+              </a:buClr>
+              <a:buSzPts val="1400"/>
+            </a:pPr>
+            <a:r>
+              <a:rPr lang="en-US" sz="2000" dirty="0">
+                <a:solidFill>
+                  <a:srgbClr val="000000"/>
+                </a:solidFill>
+                <a:ea typeface="Calibri" panose="020F0502020204030204" pitchFamily="34" charset="0"/>
+                <a:cs typeface="Times New Roman" panose="02020603050405020304" pitchFamily="18" charset="0"/>
+              </a:rPr>
+              <a:t>Each tool contributes differently to the learning ecosystem.</a:t>
             </a:r>
             <a:endParaRPr lang="en-US" sz="3600" dirty="0">
               <a:ea typeface="Calibri" panose="020F0502020204030204" pitchFamily="34" charset="0"/>
@@ -12167,6 +10822,18 @@
             </a:endParaRPr>
           </a:p>
           <a:p>
+            <a:pPr marL="139700" lvl="0">
+              <a:buClr>
+                <a:srgbClr val="000000"/>
+              </a:buClr>
+              <a:buSzPts val="1400"/>
+            </a:pPr>
+            <a:r>
+              <a:rPr lang="en-IN" sz="2000" dirty="0"/>
+              <a:t>The study follows a dataset-driven experimental approach:</a:t>
+            </a:r>
+          </a:p>
+          <a:p>
             <a:pPr marL="457200" lvl="0" indent="-317500">
               <a:buClr>
                 <a:srgbClr val="000000"/>
@@ -12174,10 +10841,7 @@
               <a:buSzPts val="1400"/>
               <a:buChar char="●"/>
             </a:pPr>
-            <a:r>
-              <a:rPr lang="en-IN" sz="2000" dirty="0"/>
-              <a:t>Dataset-based analysis (not real students)</a:t>
-            </a:r>
+            <a:endParaRPr lang="en-US" sz="2000" dirty="0"/>
           </a:p>
           <a:p>
             <a:pPr marL="457200" lvl="0" indent="-317500">
@@ -12187,6 +10851,19 @@
               <a:buSzPts val="1400"/>
               <a:buChar char="●"/>
             </a:pPr>
+            <a:r>
+              <a:rPr lang="en-US" sz="2000" dirty="0"/>
+              <a:t>The same academic tasks were given to all AI tools</a:t>
+            </a:r>
+          </a:p>
+          <a:p>
+            <a:pPr marL="457200" lvl="0" indent="-317500">
+              <a:buClr>
+                <a:srgbClr val="000000"/>
+              </a:buClr>
+              <a:buSzPts val="1400"/>
+              <a:buChar char="●"/>
+            </a:pPr>
             <a:endParaRPr lang="en-US" sz="2000" dirty="0"/>
           </a:p>
           <a:p>
@@ -12199,7 +10876,7 @@
             </a:pPr>
             <a:r>
               <a:rPr lang="en-US" sz="2000" dirty="0"/>
-              <a:t>Same tasks used for all tools </a:t>
+              <a:t>Tasks included concept explanation, problem-solving, content generation, and revision</a:t>
             </a:r>
           </a:p>
           <a:p>
@@ -12210,15 +10887,60 @@
               <a:buSzPts val="1400"/>
               <a:buChar char="●"/>
             </a:pPr>
+            <a:endParaRPr lang="en-US" sz="2000" dirty="0"/>
+          </a:p>
+          <a:p>
+            <a:pPr marL="457200" lvl="0" indent="-317500">
+              <a:buClr>
+                <a:srgbClr val="000000"/>
+              </a:buClr>
+              <a:buSzPts val="1400"/>
+              <a:buChar char="●"/>
+            </a:pPr>
+            <a:r>
+              <a:rPr lang="en-US" sz="2000" dirty="0"/>
+              <a:t>Controlled environment ensures fairness in evaluation</a:t>
+            </a:r>
+          </a:p>
+          <a:p>
+            <a:pPr marL="457200" lvl="0" indent="-317500">
+              <a:buClr>
+                <a:srgbClr val="000000"/>
+              </a:buClr>
+              <a:buSzPts val="1400"/>
+              <a:buChar char="●"/>
+            </a:pPr>
+            <a:endParaRPr lang="en-US" sz="2000" dirty="0"/>
+          </a:p>
+          <a:p>
+            <a:pPr marL="457200" lvl="0" indent="-317500">
+              <a:buClr>
+                <a:srgbClr val="000000"/>
+              </a:buClr>
+              <a:buSzPts val="1400"/>
+              <a:buChar char="●"/>
+            </a:pPr>
+            <a:r>
+              <a:rPr lang="en-US" sz="2000" dirty="0"/>
+              <a:t>Multiple iterations were performed and results were averaged </a:t>
+            </a:r>
+          </a:p>
+          <a:p>
+            <a:pPr marL="457200" lvl="0" indent="-317500">
+              <a:buClr>
+                <a:srgbClr val="000000"/>
+              </a:buClr>
+              <a:buSzPts val="1400"/>
+              <a:buChar char="●"/>
+            </a:pPr>
             <a:endParaRPr lang="en-IN" sz="2000" dirty="0"/>
           </a:p>
           <a:p>
-            <a:pPr marL="457200" lvl="0" indent="-317500">
-              <a:buClr>
-                <a:srgbClr val="000000"/>
-              </a:buClr>
-              <a:buSzPts val="1400"/>
-              <a:buChar char="●"/>
+            <a:pPr marL="139700" lvl="0">
+              <a:buClr>
+                <a:srgbClr val="000000"/>
+              </a:buClr>
+              <a:buSzPts val="1400"/>
             </a:pPr>
             <a:r>
               <a:rPr lang="en-US" sz="2000" dirty="0">
@@ -12228,84 +10950,38 @@
                 <a:ea typeface="Calibri" panose="020F0502020204030204" pitchFamily="34" charset="0"/>
                 <a:cs typeface="Times New Roman" panose="02020603050405020304" pitchFamily="18" charset="0"/>
               </a:rPr>
-              <a:t>Tasks included:</a:t>
-            </a:r>
-          </a:p>
-          <a:p>
-            <a:pPr marL="914400" lvl="1" indent="-317500">
-              <a:buClr>
-                <a:srgbClr val="000000"/>
-              </a:buClr>
-              <a:buSzPts val="1400"/>
-              <a:buChar char="●"/>
-            </a:pPr>
-            <a:r>
-              <a:rPr lang="en-US" sz="2000" dirty="0">
-                <a:solidFill>
-                  <a:srgbClr val="000000"/>
-                </a:solidFill>
-                <a:ea typeface="Calibri" panose="020F0502020204030204" pitchFamily="34" charset="0"/>
-                <a:cs typeface="Times New Roman" panose="02020603050405020304" pitchFamily="18" charset="0"/>
-              </a:rPr>
-              <a:t>Concept explanation </a:t>
-            </a:r>
-          </a:p>
-          <a:p>
-            <a:pPr marL="914400" lvl="1" indent="-317500">
-              <a:buClr>
-                <a:srgbClr val="000000"/>
-              </a:buClr>
-              <a:buSzPts val="1400"/>
-              <a:buChar char="●"/>
-            </a:pPr>
-            <a:r>
-              <a:rPr lang="en-US" sz="2000" dirty="0">
-                <a:solidFill>
-                  <a:srgbClr val="000000"/>
-                </a:solidFill>
-                <a:ea typeface="Calibri" panose="020F0502020204030204" pitchFamily="34" charset="0"/>
-                <a:cs typeface="Times New Roman" panose="02020603050405020304" pitchFamily="18" charset="0"/>
-              </a:rPr>
-              <a:t>Problem-solving </a:t>
-            </a:r>
-          </a:p>
-          <a:p>
-            <a:pPr marL="914400" lvl="1" indent="-317500">
-              <a:buClr>
-                <a:srgbClr val="000000"/>
-              </a:buClr>
-              <a:buSzPts val="1400"/>
-              <a:buChar char="●"/>
-            </a:pPr>
-            <a:r>
-              <a:rPr lang="en-US" sz="2000" dirty="0">
-                <a:solidFill>
-                  <a:srgbClr val="000000"/>
-                </a:solidFill>
-                <a:ea typeface="Calibri" panose="020F0502020204030204" pitchFamily="34" charset="0"/>
-                <a:cs typeface="Times New Roman" panose="02020603050405020304" pitchFamily="18" charset="0"/>
-              </a:rPr>
-              <a:t>Content generation </a:t>
-            </a:r>
-          </a:p>
-          <a:p>
-            <a:pPr marL="914400" lvl="1" indent="-317500">
-              <a:buClr>
-                <a:srgbClr val="000000"/>
-              </a:buClr>
-              <a:buSzPts val="1400"/>
-              <a:buChar char="●"/>
-            </a:pPr>
-            <a:r>
-              <a:rPr lang="en-US" sz="2000" dirty="0">
-                <a:solidFill>
-                  <a:srgbClr val="000000"/>
-                </a:solidFill>
-                <a:ea typeface="Calibri" panose="020F0502020204030204" pitchFamily="34" charset="0"/>
-                <a:cs typeface="Times New Roman" panose="02020603050405020304" pitchFamily="18" charset="0"/>
-              </a:rPr>
-              <a:t>Revision </a:t>
-            </a:r>
+              <a:t>The goal was to simulate real academic usage while maintaining consistency.</a:t>
+            </a:r>
+          </a:p>
+          <a:p>
+            <a:pPr marL="139700" lvl="0">
+              <a:buClr>
+                <a:srgbClr val="000000"/>
+              </a:buClr>
+              <a:buSzPts val="1400"/>
+            </a:pPr>
+            <a:endParaRPr lang="en-US" sz="2000" dirty="0">
+              <a:solidFill>
+                <a:srgbClr val="000000"/>
+              </a:solidFill>
+              <a:ea typeface="Calibri" panose="020F0502020204030204" pitchFamily="34" charset="0"/>
+              <a:cs typeface="Times New Roman" panose="02020603050405020304" pitchFamily="18" charset="0"/>
+            </a:endParaRPr>
+          </a:p>
+          <a:p>
+            <a:pPr marL="139700" lvl="0">
+              <a:buClr>
+                <a:srgbClr val="000000"/>
+              </a:buClr>
+              <a:buSzPts val="1400"/>
+            </a:pPr>
+            <a:endParaRPr lang="en-US" sz="2000" dirty="0">
+              <a:solidFill>
+                <a:srgbClr val="000000"/>
+              </a:solidFill>
+              <a:ea typeface="Calibri" panose="020F0502020204030204" pitchFamily="34" charset="0"/>
+              <a:cs typeface="Times New Roman" panose="02020603050405020304" pitchFamily="18" charset="0"/>
+            </a:endParaRPr>
           </a:p>
           <a:p>
             <a:pPr marL="457200" lvl="0" indent="-317500">
@@ -12668,6 +11344,27 @@
           </a:bodyPr>
           <a:lstStyle/>
           <a:p>
+            <a:pPr marL="139700" lvl="0">
+              <a:buClr>
+                <a:srgbClr val="000000"/>
+              </a:buClr>
+              <a:buSzPts val="1400"/>
+            </a:pPr>
+            <a:endParaRPr lang="en-IN" sz="2000" dirty="0"/>
+          </a:p>
+          <a:p>
+            <a:pPr marL="139700" lvl="0">
+              <a:buClr>
+                <a:srgbClr val="000000"/>
+              </a:buClr>
+              <a:buSzPts val="1400"/>
+            </a:pPr>
+            <a:r>
+              <a:rPr lang="en-IN" sz="2000" dirty="0"/>
+              <a:t>The performance of AI tools were evaluated using:</a:t>
+            </a:r>
+          </a:p>
+          <a:p>
             <a:pPr marL="457200" lvl="0" indent="-317500">
               <a:buClr>
                 <a:srgbClr val="000000"/>
@@ -12861,16 +11558,15 @@
                 <a:ea typeface="Calibri" panose="020F0502020204030204" pitchFamily="34" charset="0"/>
                 <a:cs typeface="Times New Roman" panose="02020603050405020304" pitchFamily="18" charset="0"/>
               </a:rPr>
-              <a:t>Clarity </a:t>
-            </a:r>
-          </a:p>
-          <a:p>
-            <a:pPr marL="457200" lvl="0" indent="-317500">
-              <a:buClr>
-                <a:srgbClr val="000000"/>
-              </a:buClr>
-              <a:buSzPts val="1400"/>
-              <a:buChar char="●"/>
+              <a:t>Clarity of explanation </a:t>
+            </a:r>
+          </a:p>
+          <a:p>
+            <a:pPr marL="139700" lvl="0">
+              <a:buClr>
+                <a:srgbClr val="000000"/>
+              </a:buClr>
+              <a:buSzPts val="1400"/>
             </a:pPr>
             <a:endParaRPr lang="en-US" sz="2000" dirty="0">
               <a:solidFill>
@@ -12887,6 +11583,16 @@
               </a:buClr>
               <a:buSzPts val="1400"/>
             </a:pPr>
+            <a:r>
+              <a:rPr lang="en-US" sz="2000" dirty="0">
+                <a:solidFill>
+                  <a:srgbClr val="000000"/>
+                </a:solidFill>
+                <a:ea typeface="Calibri" panose="020F0502020204030204" pitchFamily="34" charset="0"/>
+                <a:cs typeface="Times New Roman" panose="02020603050405020304" pitchFamily="18" charset="0"/>
+              </a:rPr>
+              <a:t>A weighted scoring system was used to ensure balanced evaluation.</a:t>
+            </a:r>
             <a:endParaRPr lang="en-US" sz="3600" dirty="0">
               <a:ea typeface="Calibri" panose="020F0502020204030204" pitchFamily="34" charset="0"/>
               <a:cs typeface="Times New Roman" panose="02020603050405020304" pitchFamily="18" charset="0"/>
